--- a/docs/BSN-Lacak-ArtiVisi.pptx
+++ b/docs/BSN-Lacak-ArtiVisi.pptx
@@ -4465,7 +4465,7 @@
                 <a:ea typeface="Calibri" pitchFamily="34" charset="-122"/>
                 <a:cs typeface="Calibri" pitchFamily="34" charset="-120"/>
               </a:rPr>
-              <a:t>·  Geo-Fencing 50m server-side (1–2 hari)</a:t>
+              <a:t>✓  Geo-Fencing 50m server-side — DONE</a:t>
             </a:r>
             <a:endParaRPr lang="en-US" sz="1100" dirty="0"/>
           </a:p>
@@ -4485,7 +4485,7 @@
                 <a:ea typeface="Calibri" pitchFamily="34" charset="-122"/>
                 <a:cs typeface="Calibri" pitchFamily="34" charset="-120"/>
               </a:rPr>
-              <a:t>·  SSO Active Directory + 2FA TOTP (1 minggu)</a:t>
+              <a:t>✓  TOTP 2FA + JWT rotation 15m — DONE</a:t>
             </a:r>
             <a:endParaRPr lang="en-US" sz="1100" dirty="0"/>
           </a:p>
@@ -4505,7 +4505,7 @@
                 <a:ea typeface="Calibri" pitchFamily="34" charset="-122"/>
                 <a:cs typeface="Calibri" pitchFamily="34" charset="-120"/>
               </a:rPr>
-              <a:t>·  In-app camera lock + magic-byte server validation (1 minggu)</a:t>
+              <a:t>✓  In-app camera + magic-byte + EXIF freshness — DONE</a:t>
             </a:r>
             <a:endParaRPr lang="en-US" sz="1100" dirty="0"/>
           </a:p>
@@ -4641,7 +4641,7 @@
                 <a:ea typeface="Calibri" pitchFamily="34" charset="-122"/>
                 <a:cs typeface="Calibri" pitchFamily="34" charset="-120"/>
               </a:rPr>
-              <a:t>·  WhatsApp Business Cloud API resmi (2 minggu)</a:t>
+              <a:t>·  WhatsApp Business Cloud API resmi (tunggu akses Meta)</a:t>
             </a:r>
             <a:endParaRPr lang="en-US" sz="1100" dirty="0"/>
           </a:p>
@@ -4661,7 +4661,7 @@
                 <a:ea typeface="Calibri" pitchFamily="34" charset="-122"/>
                 <a:cs typeface="Calibri" pitchFamily="34" charset="-120"/>
               </a:rPr>
-              <a:t>·  Scheduler Pre-Due &amp; Past-Due tier DPD (1 minggu)</a:t>
+              <a:t>✓  Chat petugas ↔ supervisor realtime — DONE</a:t>
             </a:r>
             <a:endParaRPr lang="en-US" sz="1100" dirty="0"/>
           </a:p>
@@ -4681,7 +4681,7 @@
                 <a:ea typeface="Calibri" pitchFamily="34" charset="-122"/>
                 <a:cs typeface="Calibri" pitchFamily="34" charset="-120"/>
               </a:rPr>
-              <a:t>·  Smart Allocation 3-parameter (1 minggu)</a:t>
+              <a:t>✓  Smart Allocation 3-parameter — DONE</a:t>
             </a:r>
             <a:endParaRPr lang="en-US" sz="1100" dirty="0"/>
           </a:p>
@@ -4701,7 +4701,7 @@
                 <a:ea typeface="Calibri" pitchFamily="34" charset="-122"/>
                 <a:cs typeface="Calibri" pitchFamily="34" charset="-120"/>
               </a:rPr>
-              <a:t>·  Interactive WA template CTA button (1 minggu)</a:t>
+              <a:t>✓  APK Capacitor + Foreground GPS + FCM — DONE</a:t>
             </a:r>
             <a:endParaRPr lang="en-US" sz="1100" dirty="0"/>
           </a:p>
@@ -4817,7 +4817,7 @@
                 <a:ea typeface="Calibri" pitchFamily="34" charset="-122"/>
                 <a:cs typeface="Calibri" pitchFamily="34" charset="-120"/>
               </a:rPr>
-              <a:t>·  Core Banking connector REST/SFTP (2 minggu)</a:t>
+              <a:t>·  Core Banking connector REST/webhook (tunggu spec)</a:t>
             </a:r>
             <a:endParaRPr lang="en-US" sz="1100" dirty="0"/>
           </a:p>
@@ -4837,7 +4837,7 @@
                 <a:ea typeface="Calibri" pitchFamily="34" charset="-122"/>
                 <a:cs typeface="Calibri" pitchFamily="34" charset="-120"/>
               </a:rPr>
-              <a:t>·  High Availability Postgres replica (1 minggu)</a:t>
+              <a:t>·  High Availability Postgres replica (saat scale &gt; 1 region)</a:t>
             </a:r>
             <a:endParaRPr lang="en-US" sz="1100" dirty="0"/>
           </a:p>
@@ -19983,7 +19983,7 @@
                 <a:ea typeface="Calibri" pitchFamily="34" charset="-122"/>
                 <a:cs typeface="Calibri" pitchFamily="34" charset="-120"/>
               </a:rPr>
-              <a:t>✓  Klik marker → linimasa kunjungan per petugas per hari</a:t>
+              <a:t>✓  GPS trail historis dengan date picker + heatmap kunjungan</a:t>
             </a:r>
             <a:endParaRPr lang="en-US" sz="1000" dirty="0"/>
           </a:p>
@@ -20349,7 +20349,7 @@
                 <a:ea typeface="Calibri" pitchFamily="34" charset="-122"/>
                 <a:cs typeface="Calibri" pitchFamily="34" charset="-120"/>
               </a:rPr>
-              <a:t>✓  Supervisor approve/reject + catatan + push notif ke petugas</a:t>
+              <a:t>✓  Supervisor approve/reject + push notif FCM ke petugas</a:t>
             </a:r>
             <a:endParaRPr lang="en-US" sz="1000" dirty="0"/>
           </a:p>
@@ -20369,7 +20369,7 @@
                 <a:ea typeface="Calibri" pitchFamily="34" charset="-122"/>
                 <a:cs typeface="Calibri" pitchFamily="34" charset="-120"/>
               </a:rPr>
-              <a:t>✓  Arsip JSONL.gz harian otomatis untuk kepatuhan OJK MRTI</a:t>
+              <a:t>✓  Chat petugas ↔ supervisor + geofence violation + inactivity alert</a:t>
             </a:r>
             <a:endParaRPr lang="en-US" sz="1000" dirty="0"/>
           </a:p>

--- a/docs/BSN-Lacak-ArtiVisi.pptx
+++ b/docs/BSN-Lacak-ArtiVisi.pptx
@@ -19,6 +19,7 @@
     <p:sldId id="264" r:id="rId10"/>
     <p:sldId id="265" r:id="rId11"/>
     <p:sldId id="266" r:id="rId12"/>
+    <p:sldId id="270" r:id="rId21"/>
     <p:sldId id="267" r:id="rId13"/>
     <p:sldId id="268" r:id="rId14"/>
     <p:sldId id="269" r:id="rId15"/>
@@ -2701,7 +2702,7 @@
                 <a:ea typeface="Calibri" pitchFamily="34" charset="-122"/>
                 <a:cs typeface="Calibri" pitchFamily="34" charset="-120"/>
               </a:rPr>
-              <a:t>1 / 14</a:t>
+              <a:t>1 / 15</a:t>
             </a:r>
             <a:endParaRPr lang="en-US" sz="800" dirty="0"/>
           </a:p>
@@ -4205,7 +4206,7 @@
                 <a:ea typeface="Calibri" pitchFamily="34" charset="-122"/>
                 <a:cs typeface="Calibri" pitchFamily="34" charset="-120"/>
               </a:rPr>
-              <a:t>10 / 14</a:t>
+              <a:t>10 / 15</a:t>
             </a:r>
             <a:endParaRPr lang="en-US" sz="800" dirty="0"/>
           </a:p>
@@ -5897,6 +5898,1759 @@
 </file>
 
 <file path=ppt/slides/slide12.xml><?xml version="1.0" encoding="utf-8"?>
+<p:sld xmlns:a="http://schemas.openxmlformats.org/drawingml/2006/main" xmlns:p="http://schemas.openxmlformats.org/presentationml/2006/main" xmlns:r="http://schemas.openxmlformats.org/officeDocument/2006/relationships">
+  <p:cSld>
+    <p:spTree>
+      <p:nvGrpSpPr>
+        <p:cNvPr id="1" name=""/>
+        <p:cNvGrpSpPr/>
+        <p:nvPr/>
+      </p:nvGrpSpPr>
+      <p:grpSpPr/>
+      <p:sp>
+        <p:nvSpPr>
+          <p:cNvPr id="2" name="Text 0"/>
+          <p:cNvSpPr/>
+          <p:nvPr/>
+        </p:nvSpPr>
+        <p:spPr>
+          <a:xfrm>
+            <a:off x="502920" y="256032"/>
+            <a:ext cx="7772400" cy="658368"/>
+          </a:xfrm>
+          <a:prstGeom prst="rect">
+            <a:avLst/>
+          </a:prstGeom>
+          <a:noFill/>
+          <a:ln/>
+        </p:spPr>
+        <p:txBody>
+          <a:bodyPr wrap="square" lIns="0" tIns="0" rIns="0" bIns="0" rtlCol="0" anchor="b"/>
+          <a:lstStyle/>
+          <a:p>
+            <a:pPr marL="0" indent="0">
+              <a:buNone/>
+            </a:pPr>
+            <a:r>
+              <a:rPr lang="en-US" sz="2600" b="1" dirty="0">
+                <a:solidFill>
+                  <a:srgbClr val="FFFFFF"/>
+                </a:solidFill>
+                <a:latin typeface="Cambria" pitchFamily="34" charset="0"/>
+                <a:ea typeface="Cambria" pitchFamily="34" charset="-122"/>
+                <a:cs typeface="Cambria" pitchFamily="34" charset="-120"/>
+              </a:rPr>
+              <a:t>Spesifikasi Infrastruktur Sistem</a:t>
+            </a:r>
+          </a:p>
+        </p:txBody>
+      </p:sp>
+      <p:sp>
+        <p:nvSpPr>
+          <p:cNvPr id="3" name="Text 1"/>
+          <p:cNvSpPr/>
+          <p:nvPr/>
+        </p:nvSpPr>
+        <p:spPr>
+          <a:xfrm>
+            <a:off x="502920" y="237744"/>
+            <a:ext cx="8229600" cy="201168"/>
+          </a:xfrm>
+          <a:prstGeom prst="rect">
+            <a:avLst/>
+          </a:prstGeom>
+          <a:noFill/>
+          <a:ln/>
+        </p:spPr>
+        <p:txBody>
+          <a:bodyPr wrap="square" lIns="0" tIns="0" rIns="0" bIns="0" rtlCol="0" anchor="t"/>
+          <a:lstStyle/>
+          <a:p>
+            <a:pPr marL="0" indent="0">
+              <a:buNone/>
+            </a:pPr>
+            <a:r>
+              <a:rPr lang="en-US" sz="800" b="1" kern="0" spc="500" dirty="0">
+                <a:solidFill>
+                  <a:srgbClr val="E2C97E"/>
+                </a:solidFill>
+                <a:latin typeface="Calibri" pitchFamily="34" charset="0"/>
+                <a:ea typeface="Calibri" pitchFamily="34" charset="-122"/>
+                <a:cs typeface="Calibri" pitchFamily="34" charset="-120"/>
+              </a:rPr>
+              <a:t>DEPLOYMENT &amp; PERANGKAT</a:t>
+            </a:r>
+          </a:p>
+        </p:txBody>
+      </p:sp>
+      <p:sp>
+        <p:nvSpPr>
+          <p:cNvPr id="4" name="Shape 2"/>
+          <p:cNvSpPr/>
+          <p:nvPr/>
+        </p:nvSpPr>
+        <p:spPr>
+          <a:xfrm>
+            <a:off x="502920" y="932688"/>
+            <a:ext cx="8138160" cy="18288"/>
+          </a:xfrm>
+          <a:prstGeom prst="rect">
+            <a:avLst/>
+          </a:prstGeom>
+          <a:solidFill>
+            <a:srgbClr val="E2C97E">
+              <a:alpha val="35000"/>
+            </a:srgbClr>
+          </a:solidFill>
+          <a:ln w="12700">
+            <a:solidFill>
+              <a:srgbClr val="FFFFFF">
+                <a:alpha val="0"/>
+              </a:srgbClr>
+            </a:solidFill>
+            <a:prstDash val="solid"/>
+          </a:ln>
+        </p:spPr>
+        <p:txBody>
+          <a:bodyPr/>
+          <a:p/>
+        </p:txBody>
+      </p:sp>
+      <p:sp>
+        <p:nvSpPr>
+          <p:cNvPr id="5" name="Text 3"/>
+          <p:cNvSpPr/>
+          <p:nvPr/>
+        </p:nvSpPr>
+        <p:spPr>
+          <a:xfrm>
+            <a:off x="502920" y="1024128"/>
+            <a:ext cx="8138160" cy="347472"/>
+          </a:xfrm>
+          <a:prstGeom prst="rect">
+            <a:avLst/>
+          </a:prstGeom>
+          <a:noFill/>
+          <a:ln/>
+        </p:spPr>
+        <p:txBody>
+          <a:bodyPr wrap="square" lIns="0" tIns="0" rIns="0" bIns="0" rtlCol="0" anchor="ctr"/>
+          <a:lstStyle/>
+          <a:p>
+            <a:pPr marL="0" indent="0">
+              <a:buNone/>
+            </a:pPr>
+            <a:r>
+              <a:rPr lang="en-US" sz="1050" dirty="0">
+                <a:solidFill>
+                  <a:srgbClr val="BBBBBB"/>
+                </a:solidFill>
+                <a:latin typeface="Calibri" pitchFamily="34" charset="0"/>
+                <a:ea typeface="Calibri" pitchFamily="34" charset="-122"/>
+                <a:cs typeface="Calibri" pitchFamily="34" charset="-120"/>
+              </a:rPr>
+              <a:t>Tiga komponen perangkat menopang BSN Lacak: server backend, workstation supervisor, dan device petugas lapangan. Deployment on-premise di DC BSN dengan footprint minimal 2 GB VPS untuk pilot, scaling jelas hingga skala enterprise multi-cabang.</a:t>
+            </a:r>
+          </a:p>
+        </p:txBody>
+      </p:sp>
+      <p:sp>
+        <p:nvSpPr>
+          <p:cNvPr id="6" name="Shape 4"/>
+          <p:cNvSpPr/>
+          <p:nvPr/>
+        </p:nvSpPr>
+        <p:spPr>
+          <a:xfrm>
+            <a:off x="411480" y="1481328"/>
+            <a:ext cx="2011680" cy="1170432"/>
+          </a:xfrm>
+          <a:prstGeom prst="roundRect">
+            <a:avLst>
+              <a:gd name="adj" fmla="val 6250"/>
+            </a:avLst>
+          </a:prstGeom>
+          <a:solidFill>
+            <a:srgbClr val="FFFFFF">
+              <a:alpha val="8000"/>
+            </a:srgbClr>
+          </a:solidFill>
+          <a:ln w="12700">
+            <a:solidFill>
+              <a:srgbClr val="FFFFFF">
+                <a:alpha val="15000"/>
+              </a:srgbClr>
+            </a:solidFill>
+            <a:prstDash val="solid"/>
+          </a:ln>
+        </p:spPr>
+        <p:txBody>
+          <a:bodyPr/>
+          <a:p/>
+        </p:txBody>
+      </p:sp>
+      <p:pic>
+        <p:nvPicPr>
+          <p:cNvPr id="7" name="Image 0" descr="preencoded.png"/>
+          <p:cNvPicPr>
+            <a:picLocks noChangeAspect="1"/>
+          </p:cNvPicPr>
+          <p:nvPr/>
+        </p:nvPicPr>
+        <p:blipFill>
+          <a:blip r:embed="rId3"/>
+          <a:stretch>
+            <a:fillRect/>
+          </a:stretch>
+        </p:blipFill>
+        <p:spPr>
+          <a:xfrm>
+            <a:off x="576072" y="1591056"/>
+            <a:ext cx="219456" cy="219456"/>
+          </a:xfrm>
+          <a:prstGeom prst="rect">
+            <a:avLst/>
+          </a:prstGeom>
+        </p:spPr>
+      </p:pic>
+      <p:sp>
+        <p:nvSpPr>
+          <p:cNvPr id="8" name="Text 5"/>
+          <p:cNvSpPr/>
+          <p:nvPr/>
+        </p:nvSpPr>
+        <p:spPr>
+          <a:xfrm>
+            <a:off x="868680" y="1572768"/>
+            <a:ext cx="1444752" cy="256032"/>
+          </a:xfrm>
+          <a:prstGeom prst="rect">
+            <a:avLst/>
+          </a:prstGeom>
+          <a:noFill/>
+          <a:ln/>
+        </p:spPr>
+        <p:txBody>
+          <a:bodyPr wrap="square" lIns="0" tIns="0" rIns="0" bIns="0" rtlCol="0" anchor="ctr"/>
+          <a:lstStyle/>
+          <a:p>
+            <a:pPr marL="0" indent="0">
+              <a:buNone/>
+            </a:pPr>
+            <a:r>
+              <a:rPr lang="en-US" sz="1300" b="1" dirty="0">
+                <a:solidFill>
+                  <a:srgbClr val="E2C97E"/>
+                </a:solidFill>
+                <a:latin typeface="Cambria" pitchFamily="34" charset="0"/>
+                <a:ea typeface="Cambria" pitchFamily="34" charset="-122"/>
+                <a:cs typeface="Cambria" pitchFamily="34" charset="-120"/>
+              </a:rPr>
+              <a:t>Server — Demo/Pilot</a:t>
+            </a:r>
+          </a:p>
+        </p:txBody>
+      </p:sp>
+      <p:sp>
+        <p:nvSpPr>
+          <p:cNvPr id="9" name="Text 6"/>
+          <p:cNvSpPr/>
+          <p:nvPr/>
+        </p:nvSpPr>
+        <p:spPr>
+          <a:xfrm>
+            <a:off x="576072" y="1883664"/>
+            <a:ext cx="1737360" cy="676656"/>
+          </a:xfrm>
+          <a:prstGeom prst="rect">
+            <a:avLst/>
+          </a:prstGeom>
+          <a:noFill/>
+          <a:ln/>
+        </p:spPr>
+        <p:txBody>
+          <a:bodyPr wrap="square" lIns="0" tIns="0" rIns="0" bIns="0" rtlCol="0" anchor="ctr"/>
+          <a:lstStyle/>
+          <a:p>
+            <a:pPr marL="0" indent="0">
+              <a:lnSpc>
+                <a:spcPct val="135000"/>
+              </a:lnSpc>
+              <a:buNone/>
+            </a:pPr>
+            <a:r>
+              <a:rPr lang="en-US" sz="1000" dirty="0">
+                <a:solidFill>
+                  <a:srgbClr val="AAAAAA"/>
+                </a:solidFill>
+                <a:latin typeface="Calibri" pitchFamily="34" charset="0"/>
+                <a:ea typeface="Calibri" pitchFamily="34" charset="-122"/>
+                <a:cs typeface="Calibri" pitchFamily="34" charset="-120"/>
+              </a:rPr>
+              <a:t>2 GB RAM · 1-2 vCPU · 30 GB SSD · Bandwidth 1 TB/bulan. Cocok POC ≤ 10 petugas aktif, 1 cabang, &lt; 500 nasabah.</a:t>
+            </a:r>
+          </a:p>
+        </p:txBody>
+      </p:sp>
+      <p:sp>
+        <p:nvSpPr>
+          <p:cNvPr id="10" name="Shape 7"/>
+          <p:cNvSpPr/>
+          <p:nvPr/>
+        </p:nvSpPr>
+        <p:spPr>
+          <a:xfrm>
+            <a:off x="2569464" y="1481328"/>
+            <a:ext cx="2011680" cy="1170432"/>
+          </a:xfrm>
+          <a:prstGeom prst="roundRect">
+            <a:avLst>
+              <a:gd name="adj" fmla="val 6250"/>
+            </a:avLst>
+          </a:prstGeom>
+          <a:solidFill>
+            <a:srgbClr val="FFFFFF">
+              <a:alpha val="8000"/>
+            </a:srgbClr>
+          </a:solidFill>
+          <a:ln w="12700">
+            <a:solidFill>
+              <a:srgbClr val="FFFFFF">
+                <a:alpha val="15000"/>
+              </a:srgbClr>
+            </a:solidFill>
+            <a:prstDash val="solid"/>
+          </a:ln>
+        </p:spPr>
+        <p:txBody>
+          <a:bodyPr/>
+          <a:p/>
+        </p:txBody>
+      </p:sp>
+      <p:pic>
+        <p:nvPicPr>
+          <p:cNvPr id="11" name="Image 1" descr="preencoded.png"/>
+          <p:cNvPicPr>
+            <a:picLocks noChangeAspect="1"/>
+          </p:cNvPicPr>
+          <p:nvPr/>
+        </p:nvPicPr>
+        <p:blipFill>
+          <a:blip r:embed="rId4"/>
+          <a:stretch>
+            <a:fillRect/>
+          </a:stretch>
+        </p:blipFill>
+        <p:spPr>
+          <a:xfrm>
+            <a:off x="2734056" y="1591056"/>
+            <a:ext cx="219456" cy="219456"/>
+          </a:xfrm>
+          <a:prstGeom prst="rect">
+            <a:avLst/>
+          </a:prstGeom>
+        </p:spPr>
+      </p:pic>
+      <p:sp>
+        <p:nvSpPr>
+          <p:cNvPr id="12" name="Text 8"/>
+          <p:cNvSpPr/>
+          <p:nvPr/>
+        </p:nvSpPr>
+        <p:spPr>
+          <a:xfrm>
+            <a:off x="3026664" y="1572768"/>
+            <a:ext cx="1444752" cy="256032"/>
+          </a:xfrm>
+          <a:prstGeom prst="rect">
+            <a:avLst/>
+          </a:prstGeom>
+          <a:noFill/>
+          <a:ln/>
+        </p:spPr>
+        <p:txBody>
+          <a:bodyPr wrap="square" lIns="0" tIns="0" rIns="0" bIns="0" rtlCol="0" anchor="ctr"/>
+          <a:lstStyle/>
+          <a:p>
+            <a:pPr marL="0" indent="0">
+              <a:buNone/>
+            </a:pPr>
+            <a:r>
+              <a:rPr lang="en-US" sz="1300" b="1" dirty="0">
+                <a:solidFill>
+                  <a:srgbClr val="E2C97E"/>
+                </a:solidFill>
+                <a:latin typeface="Cambria" pitchFamily="34" charset="0"/>
+                <a:ea typeface="Cambria" pitchFamily="34" charset="-122"/>
+                <a:cs typeface="Cambria" pitchFamily="34" charset="-120"/>
+              </a:rPr>
+              <a:t>Server — Operasional Kecil</a:t>
+            </a:r>
+          </a:p>
+        </p:txBody>
+      </p:sp>
+      <p:sp>
+        <p:nvSpPr>
+          <p:cNvPr id="13" name="Text 9"/>
+          <p:cNvSpPr/>
+          <p:nvPr/>
+        </p:nvSpPr>
+        <p:spPr>
+          <a:xfrm>
+            <a:off x="2734056" y="1883664"/>
+            <a:ext cx="1737360" cy="676656"/>
+          </a:xfrm>
+          <a:prstGeom prst="rect">
+            <a:avLst/>
+          </a:prstGeom>
+          <a:noFill/>
+          <a:ln/>
+        </p:spPr>
+        <p:txBody>
+          <a:bodyPr wrap="square" lIns="0" tIns="0" rIns="0" bIns="0" rtlCol="0" anchor="ctr"/>
+          <a:lstStyle/>
+          <a:p>
+            <a:pPr marL="0" indent="0">
+              <a:lnSpc>
+                <a:spcPct val="135000"/>
+              </a:lnSpc>
+              <a:buNone/>
+            </a:pPr>
+            <a:r>
+              <a:rPr lang="en-US" sz="1000" dirty="0">
+                <a:solidFill>
+                  <a:srgbClr val="AAAAAA"/>
+                </a:solidFill>
+                <a:latin typeface="Calibri" pitchFamily="34" charset="0"/>
+                <a:ea typeface="Calibri" pitchFamily="34" charset="-122"/>
+                <a:cs typeface="Calibri" pitchFamily="34" charset="-120"/>
+              </a:rPr>
+              <a:t>4 GB RAM · 2 vCPU · 60 GB SSD · 2 TB/bulan. Sweet spot 1 kantor cabang: 10-50 petugas, 500-2.000 nasabah.</a:t>
+            </a:r>
+          </a:p>
+        </p:txBody>
+      </p:sp>
+      <p:sp>
+        <p:nvSpPr>
+          <p:cNvPr id="14" name="Shape 10"/>
+          <p:cNvSpPr/>
+          <p:nvPr/>
+        </p:nvSpPr>
+        <p:spPr>
+          <a:xfrm>
+            <a:off x="4727448" y="1481328"/>
+            <a:ext cx="2011680" cy="1170432"/>
+          </a:xfrm>
+          <a:prstGeom prst="roundRect">
+            <a:avLst>
+              <a:gd name="adj" fmla="val 6250"/>
+            </a:avLst>
+          </a:prstGeom>
+          <a:solidFill>
+            <a:srgbClr val="FFFFFF">
+              <a:alpha val="8000"/>
+            </a:srgbClr>
+          </a:solidFill>
+          <a:ln w="12700">
+            <a:solidFill>
+              <a:srgbClr val="FFFFFF">
+                <a:alpha val="15000"/>
+              </a:srgbClr>
+            </a:solidFill>
+            <a:prstDash val="solid"/>
+          </a:ln>
+        </p:spPr>
+        <p:txBody>
+          <a:bodyPr/>
+          <a:p/>
+        </p:txBody>
+      </p:sp>
+      <p:pic>
+        <p:nvPicPr>
+          <p:cNvPr id="15" name="Image 2" descr="preencoded.png"/>
+          <p:cNvPicPr>
+            <a:picLocks noChangeAspect="1"/>
+          </p:cNvPicPr>
+          <p:nvPr/>
+        </p:nvPicPr>
+        <p:blipFill>
+          <a:blip r:embed="rId5"/>
+          <a:stretch>
+            <a:fillRect/>
+          </a:stretch>
+        </p:blipFill>
+        <p:spPr>
+          <a:xfrm>
+            <a:off x="4892040" y="1591056"/>
+            <a:ext cx="219456" cy="219456"/>
+          </a:xfrm>
+          <a:prstGeom prst="rect">
+            <a:avLst/>
+          </a:prstGeom>
+        </p:spPr>
+      </p:pic>
+      <p:sp>
+        <p:nvSpPr>
+          <p:cNvPr id="16" name="Text 11"/>
+          <p:cNvSpPr/>
+          <p:nvPr/>
+        </p:nvSpPr>
+        <p:spPr>
+          <a:xfrm>
+            <a:off x="5184648" y="1572768"/>
+            <a:ext cx="1444752" cy="256032"/>
+          </a:xfrm>
+          <a:prstGeom prst="rect">
+            <a:avLst/>
+          </a:prstGeom>
+          <a:noFill/>
+          <a:ln/>
+        </p:spPr>
+        <p:txBody>
+          <a:bodyPr wrap="square" lIns="0" tIns="0" rIns="0" bIns="0" rtlCol="0" anchor="ctr"/>
+          <a:lstStyle/>
+          <a:p>
+            <a:pPr marL="0" indent="0">
+              <a:buNone/>
+            </a:pPr>
+            <a:r>
+              <a:rPr lang="en-US" sz="1300" b="1" dirty="0">
+                <a:solidFill>
+                  <a:srgbClr val="E2C97E"/>
+                </a:solidFill>
+                <a:latin typeface="Cambria" pitchFamily="34" charset="0"/>
+                <a:ea typeface="Cambria" pitchFamily="34" charset="-122"/>
+                <a:cs typeface="Cambria" pitchFamily="34" charset="-120"/>
+              </a:rPr>
+              <a:t>Server — Skala Menengah</a:t>
+            </a:r>
+          </a:p>
+        </p:txBody>
+      </p:sp>
+      <p:sp>
+        <p:nvSpPr>
+          <p:cNvPr id="17" name="Text 12"/>
+          <p:cNvSpPr/>
+          <p:nvPr/>
+        </p:nvSpPr>
+        <p:spPr>
+          <a:xfrm>
+            <a:off x="4892040" y="1883664"/>
+            <a:ext cx="1737360" cy="676656"/>
+          </a:xfrm>
+          <a:prstGeom prst="rect">
+            <a:avLst/>
+          </a:prstGeom>
+          <a:noFill/>
+          <a:ln/>
+        </p:spPr>
+        <p:txBody>
+          <a:bodyPr wrap="square" lIns="0" tIns="0" rIns="0" bIns="0" rtlCol="0" anchor="ctr"/>
+          <a:lstStyle/>
+          <a:p>
+            <a:pPr marL="0" indent="0">
+              <a:lnSpc>
+                <a:spcPct val="135000"/>
+              </a:lnSpc>
+              <a:buNone/>
+            </a:pPr>
+            <a:r>
+              <a:rPr lang="en-US" sz="1000" dirty="0">
+                <a:solidFill>
+                  <a:srgbClr val="AAAAAA"/>
+                </a:solidFill>
+                <a:latin typeface="Calibri" pitchFamily="34" charset="0"/>
+                <a:ea typeface="Calibri" pitchFamily="34" charset="-122"/>
+                <a:cs typeface="Calibri" pitchFamily="34" charset="-120"/>
+              </a:rPr>
+              <a:t>8 GB RAM · 4 vCPU · 120 GB SSD + storage terpisah · 5 TB/bulan. Multi-cabang 50-200 petugas, 5.000+ nasabah.</a:t>
+            </a:r>
+          </a:p>
+        </p:txBody>
+      </p:sp>
+      <p:sp>
+        <p:nvSpPr>
+          <p:cNvPr id="18" name="Shape 13"/>
+          <p:cNvSpPr/>
+          <p:nvPr/>
+        </p:nvSpPr>
+        <p:spPr>
+          <a:xfrm>
+            <a:off x="6885432" y="1481328"/>
+            <a:ext cx="2011680" cy="1170432"/>
+          </a:xfrm>
+          <a:prstGeom prst="roundRect">
+            <a:avLst>
+              <a:gd name="adj" fmla="val 6250"/>
+            </a:avLst>
+          </a:prstGeom>
+          <a:solidFill>
+            <a:srgbClr val="FFFFFF">
+              <a:alpha val="8000"/>
+            </a:srgbClr>
+          </a:solidFill>
+          <a:ln w="12700">
+            <a:solidFill>
+              <a:srgbClr val="FFFFFF">
+                <a:alpha val="15000"/>
+              </a:srgbClr>
+            </a:solidFill>
+            <a:prstDash val="solid"/>
+          </a:ln>
+        </p:spPr>
+        <p:txBody>
+          <a:bodyPr/>
+          <a:p/>
+        </p:txBody>
+      </p:sp>
+      <p:pic>
+        <p:nvPicPr>
+          <p:cNvPr id="19" name="Image 3" descr="preencoded.png"/>
+          <p:cNvPicPr>
+            <a:picLocks noChangeAspect="1"/>
+          </p:cNvPicPr>
+          <p:nvPr/>
+        </p:nvPicPr>
+        <p:blipFill>
+          <a:blip r:embed="rId6"/>
+          <a:stretch>
+            <a:fillRect/>
+          </a:stretch>
+        </p:blipFill>
+        <p:spPr>
+          <a:xfrm>
+            <a:off x="7050024" y="1591056"/>
+            <a:ext cx="219456" cy="219456"/>
+          </a:xfrm>
+          <a:prstGeom prst="rect">
+            <a:avLst/>
+          </a:prstGeom>
+        </p:spPr>
+      </p:pic>
+      <p:sp>
+        <p:nvSpPr>
+          <p:cNvPr id="20" name="Text 14"/>
+          <p:cNvSpPr/>
+          <p:nvPr/>
+        </p:nvSpPr>
+        <p:spPr>
+          <a:xfrm>
+            <a:off x="7342632" y="1572768"/>
+            <a:ext cx="1444752" cy="256032"/>
+          </a:xfrm>
+          <a:prstGeom prst="rect">
+            <a:avLst/>
+          </a:prstGeom>
+          <a:noFill/>
+          <a:ln/>
+        </p:spPr>
+        <p:txBody>
+          <a:bodyPr wrap="square" lIns="0" tIns="0" rIns="0" bIns="0" rtlCol="0" anchor="ctr"/>
+          <a:lstStyle/>
+          <a:p>
+            <a:pPr marL="0" indent="0">
+              <a:buNone/>
+            </a:pPr>
+            <a:r>
+              <a:rPr lang="en-US" sz="1300" b="1" dirty="0">
+                <a:solidFill>
+                  <a:srgbClr val="E2C97E"/>
+                </a:solidFill>
+                <a:latin typeface="Cambria" pitchFamily="34" charset="0"/>
+                <a:ea typeface="Cambria" pitchFamily="34" charset="-122"/>
+                <a:cs typeface="Cambria" pitchFamily="34" charset="-120"/>
+              </a:rPr>
+              <a:t>Server — Enterprise</a:t>
+            </a:r>
+          </a:p>
+        </p:txBody>
+      </p:sp>
+      <p:sp>
+        <p:nvSpPr>
+          <p:cNvPr id="21" name="Text 15"/>
+          <p:cNvSpPr/>
+          <p:nvPr/>
+        </p:nvSpPr>
+        <p:spPr>
+          <a:xfrm>
+            <a:off x="7050024" y="1883664"/>
+            <a:ext cx="1737360" cy="676656"/>
+          </a:xfrm>
+          <a:prstGeom prst="rect">
+            <a:avLst/>
+          </a:prstGeom>
+          <a:noFill/>
+          <a:ln/>
+        </p:spPr>
+        <p:txBody>
+          <a:bodyPr wrap="square" lIns="0" tIns="0" rIns="0" bIns="0" rtlCol="0" anchor="ctr"/>
+          <a:lstStyle/>
+          <a:p>
+            <a:pPr marL="0" indent="0">
+              <a:lnSpc>
+                <a:spcPct val="135000"/>
+              </a:lnSpc>
+              <a:buNone/>
+            </a:pPr>
+            <a:r>
+              <a:rPr lang="en-US" sz="1000" dirty="0">
+                <a:solidFill>
+                  <a:srgbClr val="AAAAAA"/>
+                </a:solidFill>
+                <a:latin typeface="Calibri" pitchFamily="34" charset="0"/>
+                <a:ea typeface="Calibri" pitchFamily="34" charset="-122"/>
+                <a:cs typeface="Calibri" pitchFamily="34" charset="-120"/>
+              </a:rPr>
+              <a:t>16+ GB RAM · 8+ vCPU · DB terpisah + S3 storage · Private link. 200+ petugas, HA replica, disaster recovery.</a:t>
+            </a:r>
+          </a:p>
+        </p:txBody>
+      </p:sp>
+      <p:sp>
+        <p:nvSpPr>
+          <p:cNvPr id="22" name="Shape 16"/>
+          <p:cNvSpPr/>
+          <p:nvPr/>
+        </p:nvSpPr>
+        <p:spPr>
+          <a:xfrm>
+            <a:off x="411480" y="2761488"/>
+            <a:ext cx="2011680" cy="1170432"/>
+          </a:xfrm>
+          <a:prstGeom prst="roundRect">
+            <a:avLst>
+              <a:gd name="adj" fmla="val 6250"/>
+            </a:avLst>
+          </a:prstGeom>
+          <a:solidFill>
+            <a:srgbClr val="FFFFFF">
+              <a:alpha val="8000"/>
+            </a:srgbClr>
+          </a:solidFill>
+          <a:ln w="12700">
+            <a:solidFill>
+              <a:srgbClr val="FFFFFF">
+                <a:alpha val="15000"/>
+              </a:srgbClr>
+            </a:solidFill>
+            <a:prstDash val="solid"/>
+          </a:ln>
+        </p:spPr>
+        <p:txBody>
+          <a:bodyPr/>
+          <a:p/>
+        </p:txBody>
+      </p:sp>
+      <p:pic>
+        <p:nvPicPr>
+          <p:cNvPr id="23" name="Image 4" descr="preencoded.png"/>
+          <p:cNvPicPr>
+            <a:picLocks noChangeAspect="1"/>
+          </p:cNvPicPr>
+          <p:nvPr/>
+        </p:nvPicPr>
+        <p:blipFill>
+          <a:blip r:embed="rId7"/>
+          <a:stretch>
+            <a:fillRect/>
+          </a:stretch>
+        </p:blipFill>
+        <p:spPr>
+          <a:xfrm>
+            <a:off x="576072" y="2871216"/>
+            <a:ext cx="219456" cy="219456"/>
+          </a:xfrm>
+          <a:prstGeom prst="rect">
+            <a:avLst/>
+          </a:prstGeom>
+        </p:spPr>
+      </p:pic>
+      <p:sp>
+        <p:nvSpPr>
+          <p:cNvPr id="24" name="Text 17"/>
+          <p:cNvSpPr/>
+          <p:nvPr/>
+        </p:nvSpPr>
+        <p:spPr>
+          <a:xfrm>
+            <a:off x="868680" y="2852928"/>
+            <a:ext cx="1444752" cy="256032"/>
+          </a:xfrm>
+          <a:prstGeom prst="rect">
+            <a:avLst/>
+          </a:prstGeom>
+          <a:noFill/>
+          <a:ln/>
+        </p:spPr>
+        <p:txBody>
+          <a:bodyPr wrap="square" lIns="0" tIns="0" rIns="0" bIns="0" rtlCol="0" anchor="ctr"/>
+          <a:lstStyle/>
+          <a:p>
+            <a:pPr marL="0" indent="0">
+              <a:buNone/>
+            </a:pPr>
+            <a:r>
+              <a:rPr lang="en-US" sz="1300" b="1" dirty="0">
+                <a:solidFill>
+                  <a:srgbClr val="E2C97E"/>
+                </a:solidFill>
+                <a:latin typeface="Cambria" pitchFamily="34" charset="0"/>
+                <a:ea typeface="Cambria" pitchFamily="34" charset="-122"/>
+                <a:cs typeface="Cambria" pitchFamily="34" charset="-120"/>
+              </a:rPr>
+              <a:t>Laptop Supervisor</a:t>
+            </a:r>
+          </a:p>
+        </p:txBody>
+      </p:sp>
+      <p:sp>
+        <p:nvSpPr>
+          <p:cNvPr id="25" name="Text 18"/>
+          <p:cNvSpPr/>
+          <p:nvPr/>
+        </p:nvSpPr>
+        <p:spPr>
+          <a:xfrm>
+            <a:off x="576072" y="3163824"/>
+            <a:ext cx="1737360" cy="676656"/>
+          </a:xfrm>
+          <a:prstGeom prst="rect">
+            <a:avLst/>
+          </a:prstGeom>
+          <a:noFill/>
+          <a:ln/>
+        </p:spPr>
+        <p:txBody>
+          <a:bodyPr wrap="square" lIns="0" tIns="0" rIns="0" bIns="0" rtlCol="0" anchor="ctr"/>
+          <a:lstStyle/>
+          <a:p>
+            <a:pPr marL="0" indent="0">
+              <a:lnSpc>
+                <a:spcPct val="135000"/>
+              </a:lnSpc>
+              <a:buNone/>
+            </a:pPr>
+            <a:r>
+              <a:rPr lang="en-US" sz="1000" dirty="0">
+                <a:solidFill>
+                  <a:srgbClr val="AAAAAA"/>
+                </a:solidFill>
+                <a:latin typeface="Calibri" pitchFamily="34" charset="0"/>
+                <a:ea typeface="Calibri" pitchFamily="34" charset="-122"/>
+                <a:cs typeface="Calibri" pitchFamily="34" charset="-120"/>
+              </a:rPr>
+              <a:t>RAM 4 GB min (rec 8 GB) · Chrome/Edge/Firefox terbaru · Layar 14" Full HD · Internet stabil untuk SSE realtime.</a:t>
+            </a:r>
+          </a:p>
+        </p:txBody>
+      </p:sp>
+      <p:sp>
+        <p:nvSpPr>
+          <p:cNvPr id="26" name="Shape 19"/>
+          <p:cNvSpPr/>
+          <p:nvPr/>
+        </p:nvSpPr>
+        <p:spPr>
+          <a:xfrm>
+            <a:off x="2569464" y="2761488"/>
+            <a:ext cx="2011680" cy="1170432"/>
+          </a:xfrm>
+          <a:prstGeom prst="roundRect">
+            <a:avLst>
+              <a:gd name="adj" fmla="val 6250"/>
+            </a:avLst>
+          </a:prstGeom>
+          <a:solidFill>
+            <a:srgbClr val="FFFFFF">
+              <a:alpha val="8000"/>
+            </a:srgbClr>
+          </a:solidFill>
+          <a:ln w="12700">
+            <a:solidFill>
+              <a:srgbClr val="FFFFFF">
+                <a:alpha val="15000"/>
+              </a:srgbClr>
+            </a:solidFill>
+            <a:prstDash val="solid"/>
+          </a:ln>
+        </p:spPr>
+        <p:txBody>
+          <a:bodyPr/>
+          <a:p/>
+        </p:txBody>
+      </p:sp>
+      <p:pic>
+        <p:nvPicPr>
+          <p:cNvPr id="27" name="Image 5" descr="preencoded.png"/>
+          <p:cNvPicPr>
+            <a:picLocks noChangeAspect="1"/>
+          </p:cNvPicPr>
+          <p:nvPr/>
+        </p:nvPicPr>
+        <p:blipFill>
+          <a:blip r:embed="rId8"/>
+          <a:stretch>
+            <a:fillRect/>
+          </a:stretch>
+        </p:blipFill>
+        <p:spPr>
+          <a:xfrm>
+            <a:off x="2734056" y="2871216"/>
+            <a:ext cx="219456" cy="219456"/>
+          </a:xfrm>
+          <a:prstGeom prst="rect">
+            <a:avLst/>
+          </a:prstGeom>
+        </p:spPr>
+      </p:pic>
+      <p:sp>
+        <p:nvSpPr>
+          <p:cNvPr id="28" name="Text 20"/>
+          <p:cNvSpPr/>
+          <p:nvPr/>
+        </p:nvSpPr>
+        <p:spPr>
+          <a:xfrm>
+            <a:off x="3026664" y="2852928"/>
+            <a:ext cx="1444752" cy="256032"/>
+          </a:xfrm>
+          <a:prstGeom prst="rect">
+            <a:avLst/>
+          </a:prstGeom>
+          <a:noFill/>
+          <a:ln/>
+        </p:spPr>
+        <p:txBody>
+          <a:bodyPr wrap="square" lIns="0" tIns="0" rIns="0" bIns="0" rtlCol="0" anchor="ctr"/>
+          <a:lstStyle/>
+          <a:p>
+            <a:pPr marL="0" indent="0">
+              <a:buNone/>
+            </a:pPr>
+            <a:r>
+              <a:rPr lang="en-US" sz="1300" b="1" dirty="0">
+                <a:solidFill>
+                  <a:srgbClr val="E2C97E"/>
+                </a:solidFill>
+                <a:latin typeface="Cambria" pitchFamily="34" charset="0"/>
+                <a:ea typeface="Cambria" pitchFamily="34" charset="-122"/>
+                <a:cs typeface="Cambria" pitchFamily="34" charset="-120"/>
+              </a:rPr>
+              <a:t>HP Petugas — PWA</a:t>
+            </a:r>
+          </a:p>
+        </p:txBody>
+      </p:sp>
+      <p:sp>
+        <p:nvSpPr>
+          <p:cNvPr id="29" name="Text 21"/>
+          <p:cNvSpPr/>
+          <p:nvPr/>
+        </p:nvSpPr>
+        <p:spPr>
+          <a:xfrm>
+            <a:off x="2734056" y="3163824"/>
+            <a:ext cx="1737360" cy="676656"/>
+          </a:xfrm>
+          <a:prstGeom prst="rect">
+            <a:avLst/>
+          </a:prstGeom>
+          <a:noFill/>
+          <a:ln/>
+        </p:spPr>
+        <p:txBody>
+          <a:bodyPr wrap="square" lIns="0" tIns="0" rIns="0" bIns="0" rtlCol="0" anchor="ctr"/>
+          <a:lstStyle/>
+          <a:p>
+            <a:pPr marL="0" indent="0">
+              <a:lnSpc>
+                <a:spcPct val="135000"/>
+              </a:lnSpc>
+              <a:buNone/>
+            </a:pPr>
+            <a:r>
+              <a:rPr lang="en-US" sz="1000" dirty="0">
+                <a:solidFill>
+                  <a:srgbClr val="AAAAAA"/>
+                </a:solidFill>
+                <a:latin typeface="Calibri" pitchFamily="34" charset="0"/>
+                <a:ea typeface="Calibri" pitchFamily="34" charset="-122"/>
+                <a:cs typeface="Calibri" pitchFamily="34" charset="-120"/>
+              </a:rPr>
+              <a:t>RAM 2 GB · Android 8+ / iOS 14+ · Chrome 90+ / Safari 14+ · GPS aktif. Cakupan tracking ~70-85% (browser suspend saat layar mati).</a:t>
+            </a:r>
+          </a:p>
+        </p:txBody>
+      </p:sp>
+      <p:sp>
+        <p:nvSpPr>
+          <p:cNvPr id="30" name="Shape 22"/>
+          <p:cNvSpPr/>
+          <p:nvPr/>
+        </p:nvSpPr>
+        <p:spPr>
+          <a:xfrm>
+            <a:off x="4727448" y="2761488"/>
+            <a:ext cx="2011680" cy="1170432"/>
+          </a:xfrm>
+          <a:prstGeom prst="roundRect">
+            <a:avLst>
+              <a:gd name="adj" fmla="val 6250"/>
+            </a:avLst>
+          </a:prstGeom>
+          <a:solidFill>
+            <a:srgbClr val="FFFFFF">
+              <a:alpha val="8000"/>
+            </a:srgbClr>
+          </a:solidFill>
+          <a:ln w="12700">
+            <a:solidFill>
+              <a:srgbClr val="FFFFFF">
+                <a:alpha val="15000"/>
+              </a:srgbClr>
+            </a:solidFill>
+            <a:prstDash val="solid"/>
+          </a:ln>
+        </p:spPr>
+        <p:txBody>
+          <a:bodyPr/>
+          <a:p/>
+        </p:txBody>
+      </p:sp>
+      <p:pic>
+        <p:nvPicPr>
+          <p:cNvPr id="31" name="Image 6" descr="preencoded.png"/>
+          <p:cNvPicPr>
+            <a:picLocks noChangeAspect="1"/>
+          </p:cNvPicPr>
+          <p:nvPr/>
+        </p:nvPicPr>
+        <p:blipFill>
+          <a:blip r:embed="rId9"/>
+          <a:stretch>
+            <a:fillRect/>
+          </a:stretch>
+        </p:blipFill>
+        <p:spPr>
+          <a:xfrm>
+            <a:off x="4892040" y="2871216"/>
+            <a:ext cx="219456" cy="219456"/>
+          </a:xfrm>
+          <a:prstGeom prst="rect">
+            <a:avLst/>
+          </a:prstGeom>
+        </p:spPr>
+      </p:pic>
+      <p:sp>
+        <p:nvSpPr>
+          <p:cNvPr id="32" name="Text 23"/>
+          <p:cNvSpPr/>
+          <p:nvPr/>
+        </p:nvSpPr>
+        <p:spPr>
+          <a:xfrm>
+            <a:off x="5184648" y="2852928"/>
+            <a:ext cx="1444752" cy="256032"/>
+          </a:xfrm>
+          <a:prstGeom prst="rect">
+            <a:avLst/>
+          </a:prstGeom>
+          <a:noFill/>
+          <a:ln/>
+        </p:spPr>
+        <p:txBody>
+          <a:bodyPr wrap="square" lIns="0" tIns="0" rIns="0" bIns="0" rtlCol="0" anchor="ctr"/>
+          <a:lstStyle/>
+          <a:p>
+            <a:pPr marL="0" indent="0">
+              <a:buNone/>
+            </a:pPr>
+            <a:r>
+              <a:rPr lang="en-US" sz="1300" b="1" dirty="0">
+                <a:solidFill>
+                  <a:srgbClr val="E2C97E"/>
+                </a:solidFill>
+                <a:latin typeface="Cambria" pitchFamily="34" charset="0"/>
+                <a:ea typeface="Cambria" pitchFamily="34" charset="-122"/>
+                <a:cs typeface="Cambria" pitchFamily="34" charset="-120"/>
+              </a:rPr>
+              <a:t>HP Petugas — APK Native</a:t>
+            </a:r>
+          </a:p>
+        </p:txBody>
+      </p:sp>
+      <p:sp>
+        <p:nvSpPr>
+          <p:cNvPr id="33" name="Text 24"/>
+          <p:cNvSpPr/>
+          <p:nvPr/>
+        </p:nvSpPr>
+        <p:spPr>
+          <a:xfrm>
+            <a:off x="4892040" y="3163824"/>
+            <a:ext cx="1737360" cy="676656"/>
+          </a:xfrm>
+          <a:prstGeom prst="rect">
+            <a:avLst/>
+          </a:prstGeom>
+          <a:noFill/>
+          <a:ln/>
+        </p:spPr>
+        <p:txBody>
+          <a:bodyPr wrap="square" lIns="0" tIns="0" rIns="0" bIns="0" rtlCol="0" anchor="ctr"/>
+          <a:lstStyle/>
+          <a:p>
+            <a:pPr marL="0" indent="0">
+              <a:lnSpc>
+                <a:spcPct val="135000"/>
+              </a:lnSpc>
+              <a:buNone/>
+            </a:pPr>
+            <a:r>
+              <a:rPr lang="en-US" sz="1000" dirty="0">
+                <a:solidFill>
+                  <a:srgbClr val="AAAAAA"/>
+                </a:solidFill>
+                <a:latin typeface="Calibri" pitchFamily="34" charset="0"/>
+                <a:ea typeface="Calibri" pitchFamily="34" charset="-122"/>
+                <a:cs typeface="Calibri" pitchFamily="34" charset="-120"/>
+              </a:rPr>
+              <a:t>RAM 3+ GB · Android 8+ · Google Play Services WAJIB (FCM) · foreground service GPS. Cakupan tracking ~95-99% walau app tertutup.</a:t>
+            </a:r>
+          </a:p>
+        </p:txBody>
+      </p:sp>
+      <p:sp>
+        <p:nvSpPr>
+          <p:cNvPr id="34" name="Shape 25"/>
+          <p:cNvSpPr/>
+          <p:nvPr/>
+        </p:nvSpPr>
+        <p:spPr>
+          <a:xfrm>
+            <a:off x="6885432" y="2761488"/>
+            <a:ext cx="2011680" cy="1170432"/>
+          </a:xfrm>
+          <a:prstGeom prst="roundRect">
+            <a:avLst>
+              <a:gd name="adj" fmla="val 6250"/>
+            </a:avLst>
+          </a:prstGeom>
+          <a:solidFill>
+            <a:srgbClr val="FFFFFF">
+              <a:alpha val="8000"/>
+            </a:srgbClr>
+          </a:solidFill>
+          <a:ln w="12700">
+            <a:solidFill>
+              <a:srgbClr val="FFFFFF">
+                <a:alpha val="15000"/>
+              </a:srgbClr>
+            </a:solidFill>
+            <a:prstDash val="solid"/>
+          </a:ln>
+        </p:spPr>
+        <p:txBody>
+          <a:bodyPr/>
+          <a:p/>
+        </p:txBody>
+      </p:sp>
+      <p:pic>
+        <p:nvPicPr>
+          <p:cNvPr id="35" name="Image 7" descr="preencoded.png"/>
+          <p:cNvPicPr>
+            <a:picLocks noChangeAspect="1"/>
+          </p:cNvPicPr>
+          <p:nvPr/>
+        </p:nvPicPr>
+        <p:blipFill>
+          <a:blip r:embed="rId10"/>
+          <a:stretch>
+            <a:fillRect/>
+          </a:stretch>
+        </p:blipFill>
+        <p:spPr>
+          <a:xfrm>
+            <a:off x="7050024" y="2871216"/>
+            <a:ext cx="219456" cy="219456"/>
+          </a:xfrm>
+          <a:prstGeom prst="rect">
+            <a:avLst/>
+          </a:prstGeom>
+        </p:spPr>
+      </p:pic>
+      <p:sp>
+        <p:nvSpPr>
+          <p:cNvPr id="36" name="Text 26"/>
+          <p:cNvSpPr/>
+          <p:nvPr/>
+        </p:nvSpPr>
+        <p:spPr>
+          <a:xfrm>
+            <a:off x="7342632" y="2852928"/>
+            <a:ext cx="1444752" cy="256032"/>
+          </a:xfrm>
+          <a:prstGeom prst="rect">
+            <a:avLst/>
+          </a:prstGeom>
+          <a:noFill/>
+          <a:ln/>
+        </p:spPr>
+        <p:txBody>
+          <a:bodyPr wrap="square" lIns="0" tIns="0" rIns="0" bIns="0" rtlCol="0" anchor="ctr"/>
+          <a:lstStyle/>
+          <a:p>
+            <a:pPr marL="0" indent="0">
+              <a:buNone/>
+            </a:pPr>
+            <a:r>
+              <a:rPr lang="en-US" sz="1300" b="1" dirty="0">
+                <a:solidFill>
+                  <a:srgbClr val="E2C97E"/>
+                </a:solidFill>
+                <a:latin typeface="Cambria" pitchFamily="34" charset="0"/>
+                <a:ea typeface="Cambria" pitchFamily="34" charset="-122"/>
+                <a:cs typeface="Cambria" pitchFamily="34" charset="-120"/>
+              </a:rPr>
+              <a:t>Deployment &amp; Ops</a:t>
+            </a:r>
+          </a:p>
+        </p:txBody>
+      </p:sp>
+      <p:sp>
+        <p:nvSpPr>
+          <p:cNvPr id="37" name="Text 27"/>
+          <p:cNvSpPr/>
+          <p:nvPr/>
+        </p:nvSpPr>
+        <p:spPr>
+          <a:xfrm>
+            <a:off x="7050024" y="3163824"/>
+            <a:ext cx="1737360" cy="676656"/>
+          </a:xfrm>
+          <a:prstGeom prst="rect">
+            <a:avLst/>
+          </a:prstGeom>
+          <a:noFill/>
+          <a:ln/>
+        </p:spPr>
+        <p:txBody>
+          <a:bodyPr wrap="square" lIns="0" tIns="0" rIns="0" bIns="0" rtlCol="0" anchor="ctr"/>
+          <a:lstStyle/>
+          <a:p>
+            <a:pPr marL="0" indent="0">
+              <a:lnSpc>
+                <a:spcPct val="135000"/>
+              </a:lnSpc>
+              <a:buNone/>
+            </a:pPr>
+            <a:r>
+              <a:rPr lang="en-US" sz="1000" dirty="0">
+                <a:solidFill>
+                  <a:srgbClr val="AAAAAA"/>
+                </a:solidFill>
+                <a:latin typeface="Calibri" pitchFamily="34" charset="0"/>
+                <a:ea typeface="Calibri" pitchFamily="34" charset="-122"/>
+                <a:cs typeface="Calibri" pitchFamily="34" charset="-120"/>
+              </a:rPr>
+              <a:t>Docker Compose · Caddy TLS 1.3 + HTTP/3 · PostgreSQL 16 · Backup harian retensi 30 hari · TLS 1.3 Let's Encrypt auto-renew.</a:t>
+            </a:r>
+          </a:p>
+        </p:txBody>
+      </p:sp>
+      <p:sp>
+        <p:nvSpPr>
+          <p:cNvPr id="38" name="Shape 28"/>
+          <p:cNvSpPr/>
+          <p:nvPr/>
+        </p:nvSpPr>
+        <p:spPr>
+          <a:xfrm>
+            <a:off x="411480" y="4078224"/>
+            <a:ext cx="2011680" cy="749808"/>
+          </a:xfrm>
+          <a:prstGeom prst="roundRect">
+            <a:avLst>
+              <a:gd name="adj" fmla="val 9756"/>
+            </a:avLst>
+          </a:prstGeom>
+          <a:solidFill>
+            <a:srgbClr val="FFFFFF">
+              <a:alpha val="10000"/>
+            </a:srgbClr>
+          </a:solidFill>
+          <a:ln w="12700">
+            <a:solidFill>
+              <a:srgbClr val="FFFFFF">
+                <a:alpha val="15000"/>
+              </a:srgbClr>
+            </a:solidFill>
+            <a:prstDash val="solid"/>
+          </a:ln>
+        </p:spPr>
+        <p:txBody>
+          <a:bodyPr/>
+          <a:p/>
+        </p:txBody>
+      </p:sp>
+      <p:sp>
+        <p:nvSpPr>
+          <p:cNvPr id="39" name="Text 29"/>
+          <p:cNvSpPr/>
+          <p:nvPr/>
+        </p:nvSpPr>
+        <p:spPr>
+          <a:xfrm>
+            <a:off x="411480" y="4114800"/>
+            <a:ext cx="2011680" cy="347472"/>
+          </a:xfrm>
+          <a:prstGeom prst="rect">
+            <a:avLst/>
+          </a:prstGeom>
+          <a:noFill/>
+          <a:ln/>
+        </p:spPr>
+        <p:txBody>
+          <a:bodyPr wrap="square" lIns="0" tIns="0" rIns="0" bIns="0" rtlCol="0" anchor="ctr"/>
+          <a:lstStyle/>
+          <a:p>
+            <a:pPr marL="0" indent="0" algn="ctr">
+              <a:buNone/>
+            </a:pPr>
+            <a:r>
+              <a:rPr lang="en-US" sz="2200" b="1" dirty="0">
+                <a:solidFill>
+                  <a:srgbClr val="E2C97E"/>
+                </a:solidFill>
+                <a:latin typeface="Cambria" pitchFamily="34" charset="0"/>
+                <a:ea typeface="Cambria" pitchFamily="34" charset="-122"/>
+                <a:cs typeface="Cambria" pitchFamily="34" charset="-120"/>
+              </a:rPr>
+              <a:t>Rp 25 jt</a:t>
+            </a:r>
+          </a:p>
+        </p:txBody>
+      </p:sp>
+      <p:sp>
+        <p:nvSpPr>
+          <p:cNvPr id="40" name="Text 30"/>
+          <p:cNvSpPr/>
+          <p:nvPr/>
+        </p:nvSpPr>
+        <p:spPr>
+          <a:xfrm>
+            <a:off x="411480" y="4462272"/>
+            <a:ext cx="2011680" cy="274320"/>
+          </a:xfrm>
+          <a:prstGeom prst="rect">
+            <a:avLst/>
+          </a:prstGeom>
+          <a:noFill/>
+          <a:ln/>
+        </p:spPr>
+        <p:txBody>
+          <a:bodyPr wrap="square" lIns="0" tIns="0" rIns="0" bIns="0" rtlCol="0" anchor="ctr"/>
+          <a:lstStyle/>
+          <a:p>
+            <a:pPr marL="0" indent="0" algn="ctr">
+              <a:buNone/>
+            </a:pPr>
+            <a:r>
+              <a:rPr lang="en-US" sz="1000" dirty="0">
+                <a:solidFill>
+                  <a:srgbClr val="999999"/>
+                </a:solidFill>
+                <a:latin typeface="Calibri" pitchFamily="34" charset="0"/>
+                <a:ea typeface="Calibri" pitchFamily="34" charset="-122"/>
+                <a:cs typeface="Calibri" pitchFamily="34" charset="-120"/>
+              </a:rPr>
+              <a:t>CapEx 1 Cabang (6 petugas)</a:t>
+            </a:r>
+          </a:p>
+        </p:txBody>
+      </p:sp>
+      <p:sp>
+        <p:nvSpPr>
+          <p:cNvPr id="41" name="Shape 31"/>
+          <p:cNvSpPr/>
+          <p:nvPr/>
+        </p:nvSpPr>
+        <p:spPr>
+          <a:xfrm>
+            <a:off x="2569464" y="4078224"/>
+            <a:ext cx="2011680" cy="749808"/>
+          </a:xfrm>
+          <a:prstGeom prst="roundRect">
+            <a:avLst>
+              <a:gd name="adj" fmla="val 9756"/>
+            </a:avLst>
+          </a:prstGeom>
+          <a:solidFill>
+            <a:srgbClr val="FFFFFF">
+              <a:alpha val="10000"/>
+            </a:srgbClr>
+          </a:solidFill>
+          <a:ln w="12700">
+            <a:solidFill>
+              <a:srgbClr val="FFFFFF">
+                <a:alpha val="15000"/>
+              </a:srgbClr>
+            </a:solidFill>
+            <a:prstDash val="solid"/>
+          </a:ln>
+        </p:spPr>
+        <p:txBody>
+          <a:bodyPr/>
+          <a:p/>
+        </p:txBody>
+      </p:sp>
+      <p:sp>
+        <p:nvSpPr>
+          <p:cNvPr id="42" name="Text 32"/>
+          <p:cNvSpPr/>
+          <p:nvPr/>
+        </p:nvSpPr>
+        <p:spPr>
+          <a:xfrm>
+            <a:off x="2569464" y="4114800"/>
+            <a:ext cx="2011680" cy="347472"/>
+          </a:xfrm>
+          <a:prstGeom prst="rect">
+            <a:avLst/>
+          </a:prstGeom>
+          <a:noFill/>
+          <a:ln/>
+        </p:spPr>
+        <p:txBody>
+          <a:bodyPr wrap="square" lIns="0" tIns="0" rIns="0" bIns="0" rtlCol="0" anchor="ctr"/>
+          <a:lstStyle/>
+          <a:p>
+            <a:pPr marL="0" indent="0" algn="ctr">
+              <a:buNone/>
+            </a:pPr>
+            <a:r>
+              <a:rPr lang="en-US" sz="2200" b="1" dirty="0">
+                <a:solidFill>
+                  <a:srgbClr val="E2C97E"/>
+                </a:solidFill>
+                <a:latin typeface="Cambria" pitchFamily="34" charset="0"/>
+                <a:ea typeface="Cambria" pitchFamily="34" charset="-122"/>
+                <a:cs typeface="Cambria" pitchFamily="34" charset="-120"/>
+              </a:rPr>
+              <a:t>Rp 3,6 jt</a:t>
+            </a:r>
+          </a:p>
+        </p:txBody>
+      </p:sp>
+      <p:sp>
+        <p:nvSpPr>
+          <p:cNvPr id="43" name="Text 33"/>
+          <p:cNvSpPr/>
+          <p:nvPr/>
+        </p:nvSpPr>
+        <p:spPr>
+          <a:xfrm>
+            <a:off x="2569464" y="4462272"/>
+            <a:ext cx="2011680" cy="274320"/>
+          </a:xfrm>
+          <a:prstGeom prst="rect">
+            <a:avLst/>
+          </a:prstGeom>
+          <a:noFill/>
+          <a:ln/>
+        </p:spPr>
+        <p:txBody>
+          <a:bodyPr wrap="square" lIns="0" tIns="0" rIns="0" bIns="0" rtlCol="0" anchor="ctr"/>
+          <a:lstStyle/>
+          <a:p>
+            <a:pPr marL="0" indent="0" algn="ctr">
+              <a:buNone/>
+            </a:pPr>
+            <a:r>
+              <a:rPr lang="en-US" sz="1000" dirty="0">
+                <a:solidFill>
+                  <a:srgbClr val="999999"/>
+                </a:solidFill>
+                <a:latin typeface="Calibri" pitchFamily="34" charset="0"/>
+                <a:ea typeface="Calibri" pitchFamily="34" charset="-122"/>
+                <a:cs typeface="Calibri" pitchFamily="34" charset="-120"/>
+              </a:rPr>
+              <a:t>OpEx Server / Tahun</a:t>
+            </a:r>
+          </a:p>
+        </p:txBody>
+      </p:sp>
+      <p:sp>
+        <p:nvSpPr>
+          <p:cNvPr id="44" name="Shape 34"/>
+          <p:cNvSpPr/>
+          <p:nvPr/>
+        </p:nvSpPr>
+        <p:spPr>
+          <a:xfrm>
+            <a:off x="4727448" y="4078224"/>
+            <a:ext cx="2011680" cy="749808"/>
+          </a:xfrm>
+          <a:prstGeom prst="roundRect">
+            <a:avLst>
+              <a:gd name="adj" fmla="val 9756"/>
+            </a:avLst>
+          </a:prstGeom>
+          <a:solidFill>
+            <a:srgbClr val="FFFFFF">
+              <a:alpha val="10000"/>
+            </a:srgbClr>
+          </a:solidFill>
+          <a:ln w="12700">
+            <a:solidFill>
+              <a:srgbClr val="FFFFFF">
+                <a:alpha val="15000"/>
+              </a:srgbClr>
+            </a:solidFill>
+            <a:prstDash val="solid"/>
+          </a:ln>
+        </p:spPr>
+        <p:txBody>
+          <a:bodyPr/>
+          <a:p/>
+        </p:txBody>
+      </p:sp>
+      <p:sp>
+        <p:nvSpPr>
+          <p:cNvPr id="45" name="Text 35"/>
+          <p:cNvSpPr/>
+          <p:nvPr/>
+        </p:nvSpPr>
+        <p:spPr>
+          <a:xfrm>
+            <a:off x="4727448" y="4114800"/>
+            <a:ext cx="2011680" cy="347472"/>
+          </a:xfrm>
+          <a:prstGeom prst="rect">
+            <a:avLst/>
+          </a:prstGeom>
+          <a:noFill/>
+          <a:ln/>
+        </p:spPr>
+        <p:txBody>
+          <a:bodyPr wrap="square" lIns="0" tIns="0" rIns="0" bIns="0" rtlCol="0" anchor="ctr"/>
+          <a:lstStyle/>
+          <a:p>
+            <a:pPr marL="0" indent="0" algn="ctr">
+              <a:buNone/>
+            </a:pPr>
+            <a:r>
+              <a:rPr lang="en-US" sz="2200" b="1" dirty="0">
+                <a:solidFill>
+                  <a:srgbClr val="E2C97E"/>
+                </a:solidFill>
+                <a:latin typeface="Cambria" pitchFamily="34" charset="0"/>
+                <a:ea typeface="Cambria" pitchFamily="34" charset="-122"/>
+                <a:cs typeface="Cambria" pitchFamily="34" charset="-120"/>
+              </a:rPr>
+              <a:t>On-Prem</a:t>
+            </a:r>
+          </a:p>
+        </p:txBody>
+      </p:sp>
+      <p:sp>
+        <p:nvSpPr>
+          <p:cNvPr id="46" name="Text 36"/>
+          <p:cNvSpPr/>
+          <p:nvPr/>
+        </p:nvSpPr>
+        <p:spPr>
+          <a:xfrm>
+            <a:off x="4727448" y="4462272"/>
+            <a:ext cx="2011680" cy="274320"/>
+          </a:xfrm>
+          <a:prstGeom prst="rect">
+            <a:avLst/>
+          </a:prstGeom>
+          <a:noFill/>
+          <a:ln/>
+        </p:spPr>
+        <p:txBody>
+          <a:bodyPr wrap="square" lIns="0" tIns="0" rIns="0" bIns="0" rtlCol="0" anchor="ctr"/>
+          <a:lstStyle/>
+          <a:p>
+            <a:pPr marL="0" indent="0" algn="ctr">
+              <a:buNone/>
+            </a:pPr>
+            <a:r>
+              <a:rPr lang="en-US" sz="1000" dirty="0">
+                <a:solidFill>
+                  <a:srgbClr val="999999"/>
+                </a:solidFill>
+                <a:latin typeface="Calibri" pitchFamily="34" charset="0"/>
+                <a:ea typeface="Calibri" pitchFamily="34" charset="-122"/>
+                <a:cs typeface="Calibri" pitchFamily="34" charset="-120"/>
+              </a:rPr>
+              <a:t>Data Center BSN</a:t>
+            </a:r>
+          </a:p>
+        </p:txBody>
+      </p:sp>
+      <p:sp>
+        <p:nvSpPr>
+          <p:cNvPr id="47" name="Shape 37"/>
+          <p:cNvSpPr/>
+          <p:nvPr/>
+        </p:nvSpPr>
+        <p:spPr>
+          <a:xfrm>
+            <a:off x="6885432" y="4078224"/>
+            <a:ext cx="2011680" cy="749808"/>
+          </a:xfrm>
+          <a:prstGeom prst="roundRect">
+            <a:avLst>
+              <a:gd name="adj" fmla="val 9756"/>
+            </a:avLst>
+          </a:prstGeom>
+          <a:solidFill>
+            <a:srgbClr val="FFFFFF">
+              <a:alpha val="10000"/>
+            </a:srgbClr>
+          </a:solidFill>
+          <a:ln w="12700">
+            <a:solidFill>
+              <a:srgbClr val="FFFFFF">
+                <a:alpha val="15000"/>
+              </a:srgbClr>
+            </a:solidFill>
+            <a:prstDash val="solid"/>
+          </a:ln>
+        </p:spPr>
+        <p:txBody>
+          <a:bodyPr/>
+          <a:p/>
+        </p:txBody>
+      </p:sp>
+      <p:sp>
+        <p:nvSpPr>
+          <p:cNvPr id="48" name="Text 38"/>
+          <p:cNvSpPr/>
+          <p:nvPr/>
+        </p:nvSpPr>
+        <p:spPr>
+          <a:xfrm>
+            <a:off x="6885432" y="4114800"/>
+            <a:ext cx="2011680" cy="347472"/>
+          </a:xfrm>
+          <a:prstGeom prst="rect">
+            <a:avLst/>
+          </a:prstGeom>
+          <a:noFill/>
+          <a:ln/>
+        </p:spPr>
+        <p:txBody>
+          <a:bodyPr wrap="square" lIns="0" tIns="0" rIns="0" bIns="0" rtlCol="0" anchor="ctr"/>
+          <a:lstStyle/>
+          <a:p>
+            <a:pPr marL="0" indent="0" algn="ctr">
+              <a:buNone/>
+            </a:pPr>
+            <a:r>
+              <a:rPr lang="en-US" sz="2200" b="1" dirty="0">
+                <a:solidFill>
+                  <a:srgbClr val="E2C97E"/>
+                </a:solidFill>
+                <a:latin typeface="Cambria" pitchFamily="34" charset="0"/>
+                <a:ea typeface="Cambria" pitchFamily="34" charset="-122"/>
+                <a:cs typeface="Cambria" pitchFamily="34" charset="-120"/>
+              </a:rPr>
+              <a:t>30 Hari</a:t>
+            </a:r>
+          </a:p>
+        </p:txBody>
+      </p:sp>
+      <p:sp>
+        <p:nvSpPr>
+          <p:cNvPr id="49" name="Text 39"/>
+          <p:cNvSpPr/>
+          <p:nvPr/>
+        </p:nvSpPr>
+        <p:spPr>
+          <a:xfrm>
+            <a:off x="6885432" y="4462272"/>
+            <a:ext cx="2011680" cy="274320"/>
+          </a:xfrm>
+          <a:prstGeom prst="rect">
+            <a:avLst/>
+          </a:prstGeom>
+          <a:noFill/>
+          <a:ln/>
+        </p:spPr>
+        <p:txBody>
+          <a:bodyPr wrap="square" lIns="0" tIns="0" rIns="0" bIns="0" rtlCol="0" anchor="ctr"/>
+          <a:lstStyle/>
+          <a:p>
+            <a:pPr marL="0" indent="0" algn="ctr">
+              <a:buNone/>
+            </a:pPr>
+            <a:r>
+              <a:rPr lang="en-US" sz="1000" dirty="0">
+                <a:solidFill>
+                  <a:srgbClr val="999999"/>
+                </a:solidFill>
+                <a:latin typeface="Calibri" pitchFamily="34" charset="0"/>
+                <a:ea typeface="Calibri" pitchFamily="34" charset="-122"/>
+                <a:cs typeface="Calibri" pitchFamily="34" charset="-120"/>
+              </a:rPr>
+              <a:t>Retensi Backup</a:t>
+            </a:r>
+          </a:p>
+        </p:txBody>
+      </p:sp>
+      <p:sp>
+        <p:nvSpPr>
+          <p:cNvPr id="50" name="Text 40"/>
+          <p:cNvSpPr/>
+          <p:nvPr/>
+        </p:nvSpPr>
+        <p:spPr>
+          <a:xfrm>
+            <a:off x="8046720" y="4919472"/>
+            <a:ext cx="1005840" cy="201168"/>
+          </a:xfrm>
+          <a:prstGeom prst="rect">
+            <a:avLst/>
+          </a:prstGeom>
+          <a:noFill/>
+          <a:ln/>
+        </p:spPr>
+        <p:txBody>
+          <a:bodyPr wrap="square" rtlCol="0" anchor="ctr"/>
+          <a:lstStyle/>
+          <a:p>
+            <a:pPr marL="0" indent="0" algn="r">
+              <a:buNone/>
+            </a:pPr>
+            <a:r>
+              <a:rPr lang="en-US" sz="800" b="1" dirty="0">
+                <a:solidFill>
+                  <a:srgbClr val="FFFFFF">
+                    <a:alpha val="45000"/>
+                  </a:srgbClr>
+                </a:solidFill>
+                <a:latin typeface="Calibri" pitchFamily="34" charset="0"/>
+                <a:ea typeface="Calibri" pitchFamily="34" charset="-122"/>
+                <a:cs typeface="Calibri" pitchFamily="34" charset="-120"/>
+              </a:rPr>
+              <a:t>12 / 15</a:t>
+            </a:r>
+          </a:p>
+        </p:txBody>
+      </p:sp>
+    </p:spTree>
+  </p:cSld>
+  <p:clrMapOvr>
+    <a:masterClrMapping/>
+  </p:clrMapOvr>
+</p:sld>
+</file>
+
+<file path=ppt/slides/slide13.xml><?xml version="1.0" encoding="utf-8"?>
 <p:sld xmlns:a="http://schemas.openxmlformats.org/drawingml/2006/main" xmlns:r="http://schemas.openxmlformats.org/officeDocument/2006/relationships" xmlns:p="http://schemas.openxmlformats.org/presentationml/2006/main">
   <p:cSld name="Slide 12">
     <p:bg>
@@ -7810,7 +9564,7 @@
                 <a:ea typeface="Calibri" pitchFamily="34" charset="-122"/>
                 <a:cs typeface="Calibri" pitchFamily="34" charset="-120"/>
               </a:rPr>
-              <a:t>12 / 14</a:t>
+              <a:t>13 / 15</a:t>
             </a:r>
             <a:endParaRPr lang="en-US" sz="800" dirty="0"/>
           </a:p>
@@ -7824,7 +9578,7 @@
 </p:sld>
 </file>
 
-<file path=ppt/slides/slide13.xml><?xml version="1.0" encoding="utf-8"?>
+<file path=ppt/slides/slide14.xml><?xml version="1.0" encoding="utf-8"?>
 <p:sld xmlns:a="http://schemas.openxmlformats.org/drawingml/2006/main" xmlns:r="http://schemas.openxmlformats.org/officeDocument/2006/relationships" xmlns:p="http://schemas.openxmlformats.org/presentationml/2006/main">
   <p:cSld name="Slide 13">
     <p:bg>
@@ -10232,7 +11986,7 @@
                 <a:ea typeface="Calibri" pitchFamily="34" charset="-122"/>
                 <a:cs typeface="Calibri" pitchFamily="34" charset="-120"/>
               </a:rPr>
-              <a:t>13 / 14</a:t>
+              <a:t>14 / 15</a:t>
             </a:r>
             <a:endParaRPr lang="en-US" sz="800" dirty="0"/>
           </a:p>
@@ -10246,7 +12000,7 @@
 </p:sld>
 </file>
 
-<file path=ppt/slides/slide14.xml><?xml version="1.0" encoding="utf-8"?>
+<file path=ppt/slides/slide15.xml><?xml version="1.0" encoding="utf-8"?>
 <p:sld xmlns:a="http://schemas.openxmlformats.org/drawingml/2006/main" xmlns:r="http://schemas.openxmlformats.org/officeDocument/2006/relationships" xmlns:p="http://schemas.openxmlformats.org/presentationml/2006/main">
   <p:cSld name="Slide 14">
     <p:bg>
@@ -11359,7 +13113,7 @@
                 <a:ea typeface="Calibri" pitchFamily="34" charset="-122"/>
                 <a:cs typeface="Calibri" pitchFamily="34" charset="-120"/>
               </a:rPr>
-              <a:t>14 / 14</a:t>
+              <a:t>15 / 15</a:t>
             </a:r>
             <a:endParaRPr lang="en-US" sz="800" dirty="0"/>
           </a:p>
@@ -12594,7 +14348,7 @@
                 <a:ea typeface="Calibri" pitchFamily="34" charset="-122"/>
                 <a:cs typeface="Calibri" pitchFamily="34" charset="-120"/>
               </a:rPr>
-              <a:t>2 / 14</a:t>
+              <a:t>2 / 15</a:t>
             </a:r>
             <a:endParaRPr lang="en-US" sz="800" dirty="0"/>
           </a:p>
@@ -15379,7 +17133,7 @@
                 <a:ea typeface="Calibri" pitchFamily="34" charset="-122"/>
                 <a:cs typeface="Calibri" pitchFamily="34" charset="-120"/>
               </a:rPr>
-              <a:t>4 / 14</a:t>
+              <a:t>4 / 15</a:t>
             </a:r>
             <a:endParaRPr lang="en-US" sz="800" dirty="0"/>
           </a:p>
@@ -16723,7 +18477,7 @@
                 <a:ea typeface="Calibri" pitchFamily="34" charset="-122"/>
                 <a:cs typeface="Calibri" pitchFamily="34" charset="-120"/>
               </a:rPr>
-              <a:t>5 / 14</a:t>
+              <a:t>5 / 15</a:t>
             </a:r>
             <a:endParaRPr lang="en-US" sz="800" dirty="0"/>
           </a:p>
@@ -18805,7 +20559,7 @@
                 <a:ea typeface="Calibri" pitchFamily="34" charset="-122"/>
                 <a:cs typeface="Calibri" pitchFamily="34" charset="-120"/>
               </a:rPr>
-              <a:t>6 / 14</a:t>
+              <a:t>6 / 15</a:t>
             </a:r>
             <a:endParaRPr lang="en-US" sz="800" dirty="0"/>
           </a:p>
@@ -20410,7 +22164,7 @@
                 <a:ea typeface="Calibri" pitchFamily="34" charset="-122"/>
                 <a:cs typeface="Calibri" pitchFamily="34" charset="-120"/>
               </a:rPr>
-              <a:t>7 / 14</a:t>
+              <a:t>7 / 15</a:t>
             </a:r>
             <a:endParaRPr lang="en-US" sz="800" dirty="0"/>
           </a:p>
@@ -22507,7 +24261,7 @@
                 <a:ea typeface="Calibri" pitchFamily="34" charset="-122"/>
                 <a:cs typeface="Calibri" pitchFamily="34" charset="-120"/>
               </a:rPr>
-              <a:t>8 / 14</a:t>
+              <a:t>8 / 15</a:t>
             </a:r>
             <a:endParaRPr lang="en-US" sz="800" dirty="0"/>
           </a:p>
@@ -24530,7 +26284,7 @@
                 <a:ea typeface="Calibri" pitchFamily="34" charset="-122"/>
                 <a:cs typeface="Calibri" pitchFamily="34" charset="-120"/>
               </a:rPr>
-              <a:t>9 / 14</a:t>
+              <a:t>9 / 15</a:t>
             </a:r>
             <a:endParaRPr lang="en-US" sz="800" dirty="0"/>
           </a:p>

--- a/docs/BSN-Lacak-ArtiVisi.pptx
+++ b/docs/BSN-Lacak-ArtiVisi.pptx
@@ -5898,1759 +5898,6 @@
 </file>
 
 <file path=ppt/slides/slide12.xml><?xml version="1.0" encoding="utf-8"?>
-<p:sld xmlns:a="http://schemas.openxmlformats.org/drawingml/2006/main" xmlns:p="http://schemas.openxmlformats.org/presentationml/2006/main" xmlns:r="http://schemas.openxmlformats.org/officeDocument/2006/relationships">
-  <p:cSld>
-    <p:spTree>
-      <p:nvGrpSpPr>
-        <p:cNvPr id="1" name=""/>
-        <p:cNvGrpSpPr/>
-        <p:nvPr/>
-      </p:nvGrpSpPr>
-      <p:grpSpPr/>
-      <p:sp>
-        <p:nvSpPr>
-          <p:cNvPr id="2" name="Text 0"/>
-          <p:cNvSpPr/>
-          <p:nvPr/>
-        </p:nvSpPr>
-        <p:spPr>
-          <a:xfrm>
-            <a:off x="502920" y="256032"/>
-            <a:ext cx="7772400" cy="658368"/>
-          </a:xfrm>
-          <a:prstGeom prst="rect">
-            <a:avLst/>
-          </a:prstGeom>
-          <a:noFill/>
-          <a:ln/>
-        </p:spPr>
-        <p:txBody>
-          <a:bodyPr wrap="square" lIns="0" tIns="0" rIns="0" bIns="0" rtlCol="0" anchor="b"/>
-          <a:lstStyle/>
-          <a:p>
-            <a:pPr marL="0" indent="0">
-              <a:buNone/>
-            </a:pPr>
-            <a:r>
-              <a:rPr lang="en-US" sz="2600" b="1" dirty="0">
-                <a:solidFill>
-                  <a:srgbClr val="FFFFFF"/>
-                </a:solidFill>
-                <a:latin typeface="Cambria" pitchFamily="34" charset="0"/>
-                <a:ea typeface="Cambria" pitchFamily="34" charset="-122"/>
-                <a:cs typeface="Cambria" pitchFamily="34" charset="-120"/>
-              </a:rPr>
-              <a:t>Spesifikasi Infrastruktur Sistem</a:t>
-            </a:r>
-          </a:p>
-        </p:txBody>
-      </p:sp>
-      <p:sp>
-        <p:nvSpPr>
-          <p:cNvPr id="3" name="Text 1"/>
-          <p:cNvSpPr/>
-          <p:nvPr/>
-        </p:nvSpPr>
-        <p:spPr>
-          <a:xfrm>
-            <a:off x="502920" y="237744"/>
-            <a:ext cx="8229600" cy="201168"/>
-          </a:xfrm>
-          <a:prstGeom prst="rect">
-            <a:avLst/>
-          </a:prstGeom>
-          <a:noFill/>
-          <a:ln/>
-        </p:spPr>
-        <p:txBody>
-          <a:bodyPr wrap="square" lIns="0" tIns="0" rIns="0" bIns="0" rtlCol="0" anchor="t"/>
-          <a:lstStyle/>
-          <a:p>
-            <a:pPr marL="0" indent="0">
-              <a:buNone/>
-            </a:pPr>
-            <a:r>
-              <a:rPr lang="en-US" sz="800" b="1" kern="0" spc="500" dirty="0">
-                <a:solidFill>
-                  <a:srgbClr val="E2C97E"/>
-                </a:solidFill>
-                <a:latin typeface="Calibri" pitchFamily="34" charset="0"/>
-                <a:ea typeface="Calibri" pitchFamily="34" charset="-122"/>
-                <a:cs typeface="Calibri" pitchFamily="34" charset="-120"/>
-              </a:rPr>
-              <a:t>DEPLOYMENT &amp; PERANGKAT</a:t>
-            </a:r>
-          </a:p>
-        </p:txBody>
-      </p:sp>
-      <p:sp>
-        <p:nvSpPr>
-          <p:cNvPr id="4" name="Shape 2"/>
-          <p:cNvSpPr/>
-          <p:nvPr/>
-        </p:nvSpPr>
-        <p:spPr>
-          <a:xfrm>
-            <a:off x="502920" y="932688"/>
-            <a:ext cx="8138160" cy="18288"/>
-          </a:xfrm>
-          <a:prstGeom prst="rect">
-            <a:avLst/>
-          </a:prstGeom>
-          <a:solidFill>
-            <a:srgbClr val="E2C97E">
-              <a:alpha val="35000"/>
-            </a:srgbClr>
-          </a:solidFill>
-          <a:ln w="12700">
-            <a:solidFill>
-              <a:srgbClr val="FFFFFF">
-                <a:alpha val="0"/>
-              </a:srgbClr>
-            </a:solidFill>
-            <a:prstDash val="solid"/>
-          </a:ln>
-        </p:spPr>
-        <p:txBody>
-          <a:bodyPr/>
-          <a:p/>
-        </p:txBody>
-      </p:sp>
-      <p:sp>
-        <p:nvSpPr>
-          <p:cNvPr id="5" name="Text 3"/>
-          <p:cNvSpPr/>
-          <p:nvPr/>
-        </p:nvSpPr>
-        <p:spPr>
-          <a:xfrm>
-            <a:off x="502920" y="1024128"/>
-            <a:ext cx="8138160" cy="347472"/>
-          </a:xfrm>
-          <a:prstGeom prst="rect">
-            <a:avLst/>
-          </a:prstGeom>
-          <a:noFill/>
-          <a:ln/>
-        </p:spPr>
-        <p:txBody>
-          <a:bodyPr wrap="square" lIns="0" tIns="0" rIns="0" bIns="0" rtlCol="0" anchor="ctr"/>
-          <a:lstStyle/>
-          <a:p>
-            <a:pPr marL="0" indent="0">
-              <a:buNone/>
-            </a:pPr>
-            <a:r>
-              <a:rPr lang="en-US" sz="1050" dirty="0">
-                <a:solidFill>
-                  <a:srgbClr val="BBBBBB"/>
-                </a:solidFill>
-                <a:latin typeface="Calibri" pitchFamily="34" charset="0"/>
-                <a:ea typeface="Calibri" pitchFamily="34" charset="-122"/>
-                <a:cs typeface="Calibri" pitchFamily="34" charset="-120"/>
-              </a:rPr>
-              <a:t>Tiga komponen perangkat menopang BSN Lacak: server backend, workstation supervisor, dan device petugas lapangan. Deployment on-premise di DC BSN dengan footprint minimal 2 GB VPS untuk pilot, scaling jelas hingga skala enterprise multi-cabang.</a:t>
-            </a:r>
-          </a:p>
-        </p:txBody>
-      </p:sp>
-      <p:sp>
-        <p:nvSpPr>
-          <p:cNvPr id="6" name="Shape 4"/>
-          <p:cNvSpPr/>
-          <p:nvPr/>
-        </p:nvSpPr>
-        <p:spPr>
-          <a:xfrm>
-            <a:off x="411480" y="1481328"/>
-            <a:ext cx="2011680" cy="1170432"/>
-          </a:xfrm>
-          <a:prstGeom prst="roundRect">
-            <a:avLst>
-              <a:gd name="adj" fmla="val 6250"/>
-            </a:avLst>
-          </a:prstGeom>
-          <a:solidFill>
-            <a:srgbClr val="FFFFFF">
-              <a:alpha val="8000"/>
-            </a:srgbClr>
-          </a:solidFill>
-          <a:ln w="12700">
-            <a:solidFill>
-              <a:srgbClr val="FFFFFF">
-                <a:alpha val="15000"/>
-              </a:srgbClr>
-            </a:solidFill>
-            <a:prstDash val="solid"/>
-          </a:ln>
-        </p:spPr>
-        <p:txBody>
-          <a:bodyPr/>
-          <a:p/>
-        </p:txBody>
-      </p:sp>
-      <p:pic>
-        <p:nvPicPr>
-          <p:cNvPr id="7" name="Image 0" descr="preencoded.png"/>
-          <p:cNvPicPr>
-            <a:picLocks noChangeAspect="1"/>
-          </p:cNvPicPr>
-          <p:nvPr/>
-        </p:nvPicPr>
-        <p:blipFill>
-          <a:blip r:embed="rId3"/>
-          <a:stretch>
-            <a:fillRect/>
-          </a:stretch>
-        </p:blipFill>
-        <p:spPr>
-          <a:xfrm>
-            <a:off x="576072" y="1591056"/>
-            <a:ext cx="219456" cy="219456"/>
-          </a:xfrm>
-          <a:prstGeom prst="rect">
-            <a:avLst/>
-          </a:prstGeom>
-        </p:spPr>
-      </p:pic>
-      <p:sp>
-        <p:nvSpPr>
-          <p:cNvPr id="8" name="Text 5"/>
-          <p:cNvSpPr/>
-          <p:nvPr/>
-        </p:nvSpPr>
-        <p:spPr>
-          <a:xfrm>
-            <a:off x="868680" y="1572768"/>
-            <a:ext cx="1444752" cy="256032"/>
-          </a:xfrm>
-          <a:prstGeom prst="rect">
-            <a:avLst/>
-          </a:prstGeom>
-          <a:noFill/>
-          <a:ln/>
-        </p:spPr>
-        <p:txBody>
-          <a:bodyPr wrap="square" lIns="0" tIns="0" rIns="0" bIns="0" rtlCol="0" anchor="ctr"/>
-          <a:lstStyle/>
-          <a:p>
-            <a:pPr marL="0" indent="0">
-              <a:buNone/>
-            </a:pPr>
-            <a:r>
-              <a:rPr lang="en-US" sz="1300" b="1" dirty="0">
-                <a:solidFill>
-                  <a:srgbClr val="E2C97E"/>
-                </a:solidFill>
-                <a:latin typeface="Cambria" pitchFamily="34" charset="0"/>
-                <a:ea typeface="Cambria" pitchFamily="34" charset="-122"/>
-                <a:cs typeface="Cambria" pitchFamily="34" charset="-120"/>
-              </a:rPr>
-              <a:t>Server — Demo/Pilot</a:t>
-            </a:r>
-          </a:p>
-        </p:txBody>
-      </p:sp>
-      <p:sp>
-        <p:nvSpPr>
-          <p:cNvPr id="9" name="Text 6"/>
-          <p:cNvSpPr/>
-          <p:nvPr/>
-        </p:nvSpPr>
-        <p:spPr>
-          <a:xfrm>
-            <a:off x="576072" y="1883664"/>
-            <a:ext cx="1737360" cy="676656"/>
-          </a:xfrm>
-          <a:prstGeom prst="rect">
-            <a:avLst/>
-          </a:prstGeom>
-          <a:noFill/>
-          <a:ln/>
-        </p:spPr>
-        <p:txBody>
-          <a:bodyPr wrap="square" lIns="0" tIns="0" rIns="0" bIns="0" rtlCol="0" anchor="ctr"/>
-          <a:lstStyle/>
-          <a:p>
-            <a:pPr marL="0" indent="0">
-              <a:lnSpc>
-                <a:spcPct val="135000"/>
-              </a:lnSpc>
-              <a:buNone/>
-            </a:pPr>
-            <a:r>
-              <a:rPr lang="en-US" sz="1000" dirty="0">
-                <a:solidFill>
-                  <a:srgbClr val="AAAAAA"/>
-                </a:solidFill>
-                <a:latin typeface="Calibri" pitchFamily="34" charset="0"/>
-                <a:ea typeface="Calibri" pitchFamily="34" charset="-122"/>
-                <a:cs typeface="Calibri" pitchFamily="34" charset="-120"/>
-              </a:rPr>
-              <a:t>2 GB RAM · 1-2 vCPU · 30 GB SSD · Bandwidth 1 TB/bulan. Cocok POC ≤ 10 petugas aktif, 1 cabang, &lt; 500 nasabah.</a:t>
-            </a:r>
-          </a:p>
-        </p:txBody>
-      </p:sp>
-      <p:sp>
-        <p:nvSpPr>
-          <p:cNvPr id="10" name="Shape 7"/>
-          <p:cNvSpPr/>
-          <p:nvPr/>
-        </p:nvSpPr>
-        <p:spPr>
-          <a:xfrm>
-            <a:off x="2569464" y="1481328"/>
-            <a:ext cx="2011680" cy="1170432"/>
-          </a:xfrm>
-          <a:prstGeom prst="roundRect">
-            <a:avLst>
-              <a:gd name="adj" fmla="val 6250"/>
-            </a:avLst>
-          </a:prstGeom>
-          <a:solidFill>
-            <a:srgbClr val="FFFFFF">
-              <a:alpha val="8000"/>
-            </a:srgbClr>
-          </a:solidFill>
-          <a:ln w="12700">
-            <a:solidFill>
-              <a:srgbClr val="FFFFFF">
-                <a:alpha val="15000"/>
-              </a:srgbClr>
-            </a:solidFill>
-            <a:prstDash val="solid"/>
-          </a:ln>
-        </p:spPr>
-        <p:txBody>
-          <a:bodyPr/>
-          <a:p/>
-        </p:txBody>
-      </p:sp>
-      <p:pic>
-        <p:nvPicPr>
-          <p:cNvPr id="11" name="Image 1" descr="preencoded.png"/>
-          <p:cNvPicPr>
-            <a:picLocks noChangeAspect="1"/>
-          </p:cNvPicPr>
-          <p:nvPr/>
-        </p:nvPicPr>
-        <p:blipFill>
-          <a:blip r:embed="rId4"/>
-          <a:stretch>
-            <a:fillRect/>
-          </a:stretch>
-        </p:blipFill>
-        <p:spPr>
-          <a:xfrm>
-            <a:off x="2734056" y="1591056"/>
-            <a:ext cx="219456" cy="219456"/>
-          </a:xfrm>
-          <a:prstGeom prst="rect">
-            <a:avLst/>
-          </a:prstGeom>
-        </p:spPr>
-      </p:pic>
-      <p:sp>
-        <p:nvSpPr>
-          <p:cNvPr id="12" name="Text 8"/>
-          <p:cNvSpPr/>
-          <p:nvPr/>
-        </p:nvSpPr>
-        <p:spPr>
-          <a:xfrm>
-            <a:off x="3026664" y="1572768"/>
-            <a:ext cx="1444752" cy="256032"/>
-          </a:xfrm>
-          <a:prstGeom prst="rect">
-            <a:avLst/>
-          </a:prstGeom>
-          <a:noFill/>
-          <a:ln/>
-        </p:spPr>
-        <p:txBody>
-          <a:bodyPr wrap="square" lIns="0" tIns="0" rIns="0" bIns="0" rtlCol="0" anchor="ctr"/>
-          <a:lstStyle/>
-          <a:p>
-            <a:pPr marL="0" indent="0">
-              <a:buNone/>
-            </a:pPr>
-            <a:r>
-              <a:rPr lang="en-US" sz="1300" b="1" dirty="0">
-                <a:solidFill>
-                  <a:srgbClr val="E2C97E"/>
-                </a:solidFill>
-                <a:latin typeface="Cambria" pitchFamily="34" charset="0"/>
-                <a:ea typeface="Cambria" pitchFamily="34" charset="-122"/>
-                <a:cs typeface="Cambria" pitchFamily="34" charset="-120"/>
-              </a:rPr>
-              <a:t>Server — Operasional Kecil</a:t>
-            </a:r>
-          </a:p>
-        </p:txBody>
-      </p:sp>
-      <p:sp>
-        <p:nvSpPr>
-          <p:cNvPr id="13" name="Text 9"/>
-          <p:cNvSpPr/>
-          <p:nvPr/>
-        </p:nvSpPr>
-        <p:spPr>
-          <a:xfrm>
-            <a:off x="2734056" y="1883664"/>
-            <a:ext cx="1737360" cy="676656"/>
-          </a:xfrm>
-          <a:prstGeom prst="rect">
-            <a:avLst/>
-          </a:prstGeom>
-          <a:noFill/>
-          <a:ln/>
-        </p:spPr>
-        <p:txBody>
-          <a:bodyPr wrap="square" lIns="0" tIns="0" rIns="0" bIns="0" rtlCol="0" anchor="ctr"/>
-          <a:lstStyle/>
-          <a:p>
-            <a:pPr marL="0" indent="0">
-              <a:lnSpc>
-                <a:spcPct val="135000"/>
-              </a:lnSpc>
-              <a:buNone/>
-            </a:pPr>
-            <a:r>
-              <a:rPr lang="en-US" sz="1000" dirty="0">
-                <a:solidFill>
-                  <a:srgbClr val="AAAAAA"/>
-                </a:solidFill>
-                <a:latin typeface="Calibri" pitchFamily="34" charset="0"/>
-                <a:ea typeface="Calibri" pitchFamily="34" charset="-122"/>
-                <a:cs typeface="Calibri" pitchFamily="34" charset="-120"/>
-              </a:rPr>
-              <a:t>4 GB RAM · 2 vCPU · 60 GB SSD · 2 TB/bulan. Sweet spot 1 kantor cabang: 10-50 petugas, 500-2.000 nasabah.</a:t>
-            </a:r>
-          </a:p>
-        </p:txBody>
-      </p:sp>
-      <p:sp>
-        <p:nvSpPr>
-          <p:cNvPr id="14" name="Shape 10"/>
-          <p:cNvSpPr/>
-          <p:nvPr/>
-        </p:nvSpPr>
-        <p:spPr>
-          <a:xfrm>
-            <a:off x="4727448" y="1481328"/>
-            <a:ext cx="2011680" cy="1170432"/>
-          </a:xfrm>
-          <a:prstGeom prst="roundRect">
-            <a:avLst>
-              <a:gd name="adj" fmla="val 6250"/>
-            </a:avLst>
-          </a:prstGeom>
-          <a:solidFill>
-            <a:srgbClr val="FFFFFF">
-              <a:alpha val="8000"/>
-            </a:srgbClr>
-          </a:solidFill>
-          <a:ln w="12700">
-            <a:solidFill>
-              <a:srgbClr val="FFFFFF">
-                <a:alpha val="15000"/>
-              </a:srgbClr>
-            </a:solidFill>
-            <a:prstDash val="solid"/>
-          </a:ln>
-        </p:spPr>
-        <p:txBody>
-          <a:bodyPr/>
-          <a:p/>
-        </p:txBody>
-      </p:sp>
-      <p:pic>
-        <p:nvPicPr>
-          <p:cNvPr id="15" name="Image 2" descr="preencoded.png"/>
-          <p:cNvPicPr>
-            <a:picLocks noChangeAspect="1"/>
-          </p:cNvPicPr>
-          <p:nvPr/>
-        </p:nvPicPr>
-        <p:blipFill>
-          <a:blip r:embed="rId5"/>
-          <a:stretch>
-            <a:fillRect/>
-          </a:stretch>
-        </p:blipFill>
-        <p:spPr>
-          <a:xfrm>
-            <a:off x="4892040" y="1591056"/>
-            <a:ext cx="219456" cy="219456"/>
-          </a:xfrm>
-          <a:prstGeom prst="rect">
-            <a:avLst/>
-          </a:prstGeom>
-        </p:spPr>
-      </p:pic>
-      <p:sp>
-        <p:nvSpPr>
-          <p:cNvPr id="16" name="Text 11"/>
-          <p:cNvSpPr/>
-          <p:nvPr/>
-        </p:nvSpPr>
-        <p:spPr>
-          <a:xfrm>
-            <a:off x="5184648" y="1572768"/>
-            <a:ext cx="1444752" cy="256032"/>
-          </a:xfrm>
-          <a:prstGeom prst="rect">
-            <a:avLst/>
-          </a:prstGeom>
-          <a:noFill/>
-          <a:ln/>
-        </p:spPr>
-        <p:txBody>
-          <a:bodyPr wrap="square" lIns="0" tIns="0" rIns="0" bIns="0" rtlCol="0" anchor="ctr"/>
-          <a:lstStyle/>
-          <a:p>
-            <a:pPr marL="0" indent="0">
-              <a:buNone/>
-            </a:pPr>
-            <a:r>
-              <a:rPr lang="en-US" sz="1300" b="1" dirty="0">
-                <a:solidFill>
-                  <a:srgbClr val="E2C97E"/>
-                </a:solidFill>
-                <a:latin typeface="Cambria" pitchFamily="34" charset="0"/>
-                <a:ea typeface="Cambria" pitchFamily="34" charset="-122"/>
-                <a:cs typeface="Cambria" pitchFamily="34" charset="-120"/>
-              </a:rPr>
-              <a:t>Server — Skala Menengah</a:t>
-            </a:r>
-          </a:p>
-        </p:txBody>
-      </p:sp>
-      <p:sp>
-        <p:nvSpPr>
-          <p:cNvPr id="17" name="Text 12"/>
-          <p:cNvSpPr/>
-          <p:nvPr/>
-        </p:nvSpPr>
-        <p:spPr>
-          <a:xfrm>
-            <a:off x="4892040" y="1883664"/>
-            <a:ext cx="1737360" cy="676656"/>
-          </a:xfrm>
-          <a:prstGeom prst="rect">
-            <a:avLst/>
-          </a:prstGeom>
-          <a:noFill/>
-          <a:ln/>
-        </p:spPr>
-        <p:txBody>
-          <a:bodyPr wrap="square" lIns="0" tIns="0" rIns="0" bIns="0" rtlCol="0" anchor="ctr"/>
-          <a:lstStyle/>
-          <a:p>
-            <a:pPr marL="0" indent="0">
-              <a:lnSpc>
-                <a:spcPct val="135000"/>
-              </a:lnSpc>
-              <a:buNone/>
-            </a:pPr>
-            <a:r>
-              <a:rPr lang="en-US" sz="1000" dirty="0">
-                <a:solidFill>
-                  <a:srgbClr val="AAAAAA"/>
-                </a:solidFill>
-                <a:latin typeface="Calibri" pitchFamily="34" charset="0"/>
-                <a:ea typeface="Calibri" pitchFamily="34" charset="-122"/>
-                <a:cs typeface="Calibri" pitchFamily="34" charset="-120"/>
-              </a:rPr>
-              <a:t>8 GB RAM · 4 vCPU · 120 GB SSD + storage terpisah · 5 TB/bulan. Multi-cabang 50-200 petugas, 5.000+ nasabah.</a:t>
-            </a:r>
-          </a:p>
-        </p:txBody>
-      </p:sp>
-      <p:sp>
-        <p:nvSpPr>
-          <p:cNvPr id="18" name="Shape 13"/>
-          <p:cNvSpPr/>
-          <p:nvPr/>
-        </p:nvSpPr>
-        <p:spPr>
-          <a:xfrm>
-            <a:off x="6885432" y="1481328"/>
-            <a:ext cx="2011680" cy="1170432"/>
-          </a:xfrm>
-          <a:prstGeom prst="roundRect">
-            <a:avLst>
-              <a:gd name="adj" fmla="val 6250"/>
-            </a:avLst>
-          </a:prstGeom>
-          <a:solidFill>
-            <a:srgbClr val="FFFFFF">
-              <a:alpha val="8000"/>
-            </a:srgbClr>
-          </a:solidFill>
-          <a:ln w="12700">
-            <a:solidFill>
-              <a:srgbClr val="FFFFFF">
-                <a:alpha val="15000"/>
-              </a:srgbClr>
-            </a:solidFill>
-            <a:prstDash val="solid"/>
-          </a:ln>
-        </p:spPr>
-        <p:txBody>
-          <a:bodyPr/>
-          <a:p/>
-        </p:txBody>
-      </p:sp>
-      <p:pic>
-        <p:nvPicPr>
-          <p:cNvPr id="19" name="Image 3" descr="preencoded.png"/>
-          <p:cNvPicPr>
-            <a:picLocks noChangeAspect="1"/>
-          </p:cNvPicPr>
-          <p:nvPr/>
-        </p:nvPicPr>
-        <p:blipFill>
-          <a:blip r:embed="rId6"/>
-          <a:stretch>
-            <a:fillRect/>
-          </a:stretch>
-        </p:blipFill>
-        <p:spPr>
-          <a:xfrm>
-            <a:off x="7050024" y="1591056"/>
-            <a:ext cx="219456" cy="219456"/>
-          </a:xfrm>
-          <a:prstGeom prst="rect">
-            <a:avLst/>
-          </a:prstGeom>
-        </p:spPr>
-      </p:pic>
-      <p:sp>
-        <p:nvSpPr>
-          <p:cNvPr id="20" name="Text 14"/>
-          <p:cNvSpPr/>
-          <p:nvPr/>
-        </p:nvSpPr>
-        <p:spPr>
-          <a:xfrm>
-            <a:off x="7342632" y="1572768"/>
-            <a:ext cx="1444752" cy="256032"/>
-          </a:xfrm>
-          <a:prstGeom prst="rect">
-            <a:avLst/>
-          </a:prstGeom>
-          <a:noFill/>
-          <a:ln/>
-        </p:spPr>
-        <p:txBody>
-          <a:bodyPr wrap="square" lIns="0" tIns="0" rIns="0" bIns="0" rtlCol="0" anchor="ctr"/>
-          <a:lstStyle/>
-          <a:p>
-            <a:pPr marL="0" indent="0">
-              <a:buNone/>
-            </a:pPr>
-            <a:r>
-              <a:rPr lang="en-US" sz="1300" b="1" dirty="0">
-                <a:solidFill>
-                  <a:srgbClr val="E2C97E"/>
-                </a:solidFill>
-                <a:latin typeface="Cambria" pitchFamily="34" charset="0"/>
-                <a:ea typeface="Cambria" pitchFamily="34" charset="-122"/>
-                <a:cs typeface="Cambria" pitchFamily="34" charset="-120"/>
-              </a:rPr>
-              <a:t>Server — Enterprise</a:t>
-            </a:r>
-          </a:p>
-        </p:txBody>
-      </p:sp>
-      <p:sp>
-        <p:nvSpPr>
-          <p:cNvPr id="21" name="Text 15"/>
-          <p:cNvSpPr/>
-          <p:nvPr/>
-        </p:nvSpPr>
-        <p:spPr>
-          <a:xfrm>
-            <a:off x="7050024" y="1883664"/>
-            <a:ext cx="1737360" cy="676656"/>
-          </a:xfrm>
-          <a:prstGeom prst="rect">
-            <a:avLst/>
-          </a:prstGeom>
-          <a:noFill/>
-          <a:ln/>
-        </p:spPr>
-        <p:txBody>
-          <a:bodyPr wrap="square" lIns="0" tIns="0" rIns="0" bIns="0" rtlCol="0" anchor="ctr"/>
-          <a:lstStyle/>
-          <a:p>
-            <a:pPr marL="0" indent="0">
-              <a:lnSpc>
-                <a:spcPct val="135000"/>
-              </a:lnSpc>
-              <a:buNone/>
-            </a:pPr>
-            <a:r>
-              <a:rPr lang="en-US" sz="1000" dirty="0">
-                <a:solidFill>
-                  <a:srgbClr val="AAAAAA"/>
-                </a:solidFill>
-                <a:latin typeface="Calibri" pitchFamily="34" charset="0"/>
-                <a:ea typeface="Calibri" pitchFamily="34" charset="-122"/>
-                <a:cs typeface="Calibri" pitchFamily="34" charset="-120"/>
-              </a:rPr>
-              <a:t>16+ GB RAM · 8+ vCPU · DB terpisah + S3 storage · Private link. 200+ petugas, HA replica, disaster recovery.</a:t>
-            </a:r>
-          </a:p>
-        </p:txBody>
-      </p:sp>
-      <p:sp>
-        <p:nvSpPr>
-          <p:cNvPr id="22" name="Shape 16"/>
-          <p:cNvSpPr/>
-          <p:nvPr/>
-        </p:nvSpPr>
-        <p:spPr>
-          <a:xfrm>
-            <a:off x="411480" y="2761488"/>
-            <a:ext cx="2011680" cy="1170432"/>
-          </a:xfrm>
-          <a:prstGeom prst="roundRect">
-            <a:avLst>
-              <a:gd name="adj" fmla="val 6250"/>
-            </a:avLst>
-          </a:prstGeom>
-          <a:solidFill>
-            <a:srgbClr val="FFFFFF">
-              <a:alpha val="8000"/>
-            </a:srgbClr>
-          </a:solidFill>
-          <a:ln w="12700">
-            <a:solidFill>
-              <a:srgbClr val="FFFFFF">
-                <a:alpha val="15000"/>
-              </a:srgbClr>
-            </a:solidFill>
-            <a:prstDash val="solid"/>
-          </a:ln>
-        </p:spPr>
-        <p:txBody>
-          <a:bodyPr/>
-          <a:p/>
-        </p:txBody>
-      </p:sp>
-      <p:pic>
-        <p:nvPicPr>
-          <p:cNvPr id="23" name="Image 4" descr="preencoded.png"/>
-          <p:cNvPicPr>
-            <a:picLocks noChangeAspect="1"/>
-          </p:cNvPicPr>
-          <p:nvPr/>
-        </p:nvPicPr>
-        <p:blipFill>
-          <a:blip r:embed="rId7"/>
-          <a:stretch>
-            <a:fillRect/>
-          </a:stretch>
-        </p:blipFill>
-        <p:spPr>
-          <a:xfrm>
-            <a:off x="576072" y="2871216"/>
-            <a:ext cx="219456" cy="219456"/>
-          </a:xfrm>
-          <a:prstGeom prst="rect">
-            <a:avLst/>
-          </a:prstGeom>
-        </p:spPr>
-      </p:pic>
-      <p:sp>
-        <p:nvSpPr>
-          <p:cNvPr id="24" name="Text 17"/>
-          <p:cNvSpPr/>
-          <p:nvPr/>
-        </p:nvSpPr>
-        <p:spPr>
-          <a:xfrm>
-            <a:off x="868680" y="2852928"/>
-            <a:ext cx="1444752" cy="256032"/>
-          </a:xfrm>
-          <a:prstGeom prst="rect">
-            <a:avLst/>
-          </a:prstGeom>
-          <a:noFill/>
-          <a:ln/>
-        </p:spPr>
-        <p:txBody>
-          <a:bodyPr wrap="square" lIns="0" tIns="0" rIns="0" bIns="0" rtlCol="0" anchor="ctr"/>
-          <a:lstStyle/>
-          <a:p>
-            <a:pPr marL="0" indent="0">
-              <a:buNone/>
-            </a:pPr>
-            <a:r>
-              <a:rPr lang="en-US" sz="1300" b="1" dirty="0">
-                <a:solidFill>
-                  <a:srgbClr val="E2C97E"/>
-                </a:solidFill>
-                <a:latin typeface="Cambria" pitchFamily="34" charset="0"/>
-                <a:ea typeface="Cambria" pitchFamily="34" charset="-122"/>
-                <a:cs typeface="Cambria" pitchFamily="34" charset="-120"/>
-              </a:rPr>
-              <a:t>Laptop Supervisor</a:t>
-            </a:r>
-          </a:p>
-        </p:txBody>
-      </p:sp>
-      <p:sp>
-        <p:nvSpPr>
-          <p:cNvPr id="25" name="Text 18"/>
-          <p:cNvSpPr/>
-          <p:nvPr/>
-        </p:nvSpPr>
-        <p:spPr>
-          <a:xfrm>
-            <a:off x="576072" y="3163824"/>
-            <a:ext cx="1737360" cy="676656"/>
-          </a:xfrm>
-          <a:prstGeom prst="rect">
-            <a:avLst/>
-          </a:prstGeom>
-          <a:noFill/>
-          <a:ln/>
-        </p:spPr>
-        <p:txBody>
-          <a:bodyPr wrap="square" lIns="0" tIns="0" rIns="0" bIns="0" rtlCol="0" anchor="ctr"/>
-          <a:lstStyle/>
-          <a:p>
-            <a:pPr marL="0" indent="0">
-              <a:lnSpc>
-                <a:spcPct val="135000"/>
-              </a:lnSpc>
-              <a:buNone/>
-            </a:pPr>
-            <a:r>
-              <a:rPr lang="en-US" sz="1000" dirty="0">
-                <a:solidFill>
-                  <a:srgbClr val="AAAAAA"/>
-                </a:solidFill>
-                <a:latin typeface="Calibri" pitchFamily="34" charset="0"/>
-                <a:ea typeface="Calibri" pitchFamily="34" charset="-122"/>
-                <a:cs typeface="Calibri" pitchFamily="34" charset="-120"/>
-              </a:rPr>
-              <a:t>RAM 4 GB min (rec 8 GB) · Chrome/Edge/Firefox terbaru · Layar 14" Full HD · Internet stabil untuk SSE realtime.</a:t>
-            </a:r>
-          </a:p>
-        </p:txBody>
-      </p:sp>
-      <p:sp>
-        <p:nvSpPr>
-          <p:cNvPr id="26" name="Shape 19"/>
-          <p:cNvSpPr/>
-          <p:nvPr/>
-        </p:nvSpPr>
-        <p:spPr>
-          <a:xfrm>
-            <a:off x="2569464" y="2761488"/>
-            <a:ext cx="2011680" cy="1170432"/>
-          </a:xfrm>
-          <a:prstGeom prst="roundRect">
-            <a:avLst>
-              <a:gd name="adj" fmla="val 6250"/>
-            </a:avLst>
-          </a:prstGeom>
-          <a:solidFill>
-            <a:srgbClr val="FFFFFF">
-              <a:alpha val="8000"/>
-            </a:srgbClr>
-          </a:solidFill>
-          <a:ln w="12700">
-            <a:solidFill>
-              <a:srgbClr val="FFFFFF">
-                <a:alpha val="15000"/>
-              </a:srgbClr>
-            </a:solidFill>
-            <a:prstDash val="solid"/>
-          </a:ln>
-        </p:spPr>
-        <p:txBody>
-          <a:bodyPr/>
-          <a:p/>
-        </p:txBody>
-      </p:sp>
-      <p:pic>
-        <p:nvPicPr>
-          <p:cNvPr id="27" name="Image 5" descr="preencoded.png"/>
-          <p:cNvPicPr>
-            <a:picLocks noChangeAspect="1"/>
-          </p:cNvPicPr>
-          <p:nvPr/>
-        </p:nvPicPr>
-        <p:blipFill>
-          <a:blip r:embed="rId8"/>
-          <a:stretch>
-            <a:fillRect/>
-          </a:stretch>
-        </p:blipFill>
-        <p:spPr>
-          <a:xfrm>
-            <a:off x="2734056" y="2871216"/>
-            <a:ext cx="219456" cy="219456"/>
-          </a:xfrm>
-          <a:prstGeom prst="rect">
-            <a:avLst/>
-          </a:prstGeom>
-        </p:spPr>
-      </p:pic>
-      <p:sp>
-        <p:nvSpPr>
-          <p:cNvPr id="28" name="Text 20"/>
-          <p:cNvSpPr/>
-          <p:nvPr/>
-        </p:nvSpPr>
-        <p:spPr>
-          <a:xfrm>
-            <a:off x="3026664" y="2852928"/>
-            <a:ext cx="1444752" cy="256032"/>
-          </a:xfrm>
-          <a:prstGeom prst="rect">
-            <a:avLst/>
-          </a:prstGeom>
-          <a:noFill/>
-          <a:ln/>
-        </p:spPr>
-        <p:txBody>
-          <a:bodyPr wrap="square" lIns="0" tIns="0" rIns="0" bIns="0" rtlCol="0" anchor="ctr"/>
-          <a:lstStyle/>
-          <a:p>
-            <a:pPr marL="0" indent="0">
-              <a:buNone/>
-            </a:pPr>
-            <a:r>
-              <a:rPr lang="en-US" sz="1300" b="1" dirty="0">
-                <a:solidFill>
-                  <a:srgbClr val="E2C97E"/>
-                </a:solidFill>
-                <a:latin typeface="Cambria" pitchFamily="34" charset="0"/>
-                <a:ea typeface="Cambria" pitchFamily="34" charset="-122"/>
-                <a:cs typeface="Cambria" pitchFamily="34" charset="-120"/>
-              </a:rPr>
-              <a:t>HP Petugas — PWA</a:t>
-            </a:r>
-          </a:p>
-        </p:txBody>
-      </p:sp>
-      <p:sp>
-        <p:nvSpPr>
-          <p:cNvPr id="29" name="Text 21"/>
-          <p:cNvSpPr/>
-          <p:nvPr/>
-        </p:nvSpPr>
-        <p:spPr>
-          <a:xfrm>
-            <a:off x="2734056" y="3163824"/>
-            <a:ext cx="1737360" cy="676656"/>
-          </a:xfrm>
-          <a:prstGeom prst="rect">
-            <a:avLst/>
-          </a:prstGeom>
-          <a:noFill/>
-          <a:ln/>
-        </p:spPr>
-        <p:txBody>
-          <a:bodyPr wrap="square" lIns="0" tIns="0" rIns="0" bIns="0" rtlCol="0" anchor="ctr"/>
-          <a:lstStyle/>
-          <a:p>
-            <a:pPr marL="0" indent="0">
-              <a:lnSpc>
-                <a:spcPct val="135000"/>
-              </a:lnSpc>
-              <a:buNone/>
-            </a:pPr>
-            <a:r>
-              <a:rPr lang="en-US" sz="1000" dirty="0">
-                <a:solidFill>
-                  <a:srgbClr val="AAAAAA"/>
-                </a:solidFill>
-                <a:latin typeface="Calibri" pitchFamily="34" charset="0"/>
-                <a:ea typeface="Calibri" pitchFamily="34" charset="-122"/>
-                <a:cs typeface="Calibri" pitchFamily="34" charset="-120"/>
-              </a:rPr>
-              <a:t>RAM 2 GB · Android 8+ / iOS 14+ · Chrome 90+ / Safari 14+ · GPS aktif. Cakupan tracking ~70-85% (browser suspend saat layar mati).</a:t>
-            </a:r>
-          </a:p>
-        </p:txBody>
-      </p:sp>
-      <p:sp>
-        <p:nvSpPr>
-          <p:cNvPr id="30" name="Shape 22"/>
-          <p:cNvSpPr/>
-          <p:nvPr/>
-        </p:nvSpPr>
-        <p:spPr>
-          <a:xfrm>
-            <a:off x="4727448" y="2761488"/>
-            <a:ext cx="2011680" cy="1170432"/>
-          </a:xfrm>
-          <a:prstGeom prst="roundRect">
-            <a:avLst>
-              <a:gd name="adj" fmla="val 6250"/>
-            </a:avLst>
-          </a:prstGeom>
-          <a:solidFill>
-            <a:srgbClr val="FFFFFF">
-              <a:alpha val="8000"/>
-            </a:srgbClr>
-          </a:solidFill>
-          <a:ln w="12700">
-            <a:solidFill>
-              <a:srgbClr val="FFFFFF">
-                <a:alpha val="15000"/>
-              </a:srgbClr>
-            </a:solidFill>
-            <a:prstDash val="solid"/>
-          </a:ln>
-        </p:spPr>
-        <p:txBody>
-          <a:bodyPr/>
-          <a:p/>
-        </p:txBody>
-      </p:sp>
-      <p:pic>
-        <p:nvPicPr>
-          <p:cNvPr id="31" name="Image 6" descr="preencoded.png"/>
-          <p:cNvPicPr>
-            <a:picLocks noChangeAspect="1"/>
-          </p:cNvPicPr>
-          <p:nvPr/>
-        </p:nvPicPr>
-        <p:blipFill>
-          <a:blip r:embed="rId9"/>
-          <a:stretch>
-            <a:fillRect/>
-          </a:stretch>
-        </p:blipFill>
-        <p:spPr>
-          <a:xfrm>
-            <a:off x="4892040" y="2871216"/>
-            <a:ext cx="219456" cy="219456"/>
-          </a:xfrm>
-          <a:prstGeom prst="rect">
-            <a:avLst/>
-          </a:prstGeom>
-        </p:spPr>
-      </p:pic>
-      <p:sp>
-        <p:nvSpPr>
-          <p:cNvPr id="32" name="Text 23"/>
-          <p:cNvSpPr/>
-          <p:nvPr/>
-        </p:nvSpPr>
-        <p:spPr>
-          <a:xfrm>
-            <a:off x="5184648" y="2852928"/>
-            <a:ext cx="1444752" cy="256032"/>
-          </a:xfrm>
-          <a:prstGeom prst="rect">
-            <a:avLst/>
-          </a:prstGeom>
-          <a:noFill/>
-          <a:ln/>
-        </p:spPr>
-        <p:txBody>
-          <a:bodyPr wrap="square" lIns="0" tIns="0" rIns="0" bIns="0" rtlCol="0" anchor="ctr"/>
-          <a:lstStyle/>
-          <a:p>
-            <a:pPr marL="0" indent="0">
-              <a:buNone/>
-            </a:pPr>
-            <a:r>
-              <a:rPr lang="en-US" sz="1300" b="1" dirty="0">
-                <a:solidFill>
-                  <a:srgbClr val="E2C97E"/>
-                </a:solidFill>
-                <a:latin typeface="Cambria" pitchFamily="34" charset="0"/>
-                <a:ea typeface="Cambria" pitchFamily="34" charset="-122"/>
-                <a:cs typeface="Cambria" pitchFamily="34" charset="-120"/>
-              </a:rPr>
-              <a:t>HP Petugas — APK Native</a:t>
-            </a:r>
-          </a:p>
-        </p:txBody>
-      </p:sp>
-      <p:sp>
-        <p:nvSpPr>
-          <p:cNvPr id="33" name="Text 24"/>
-          <p:cNvSpPr/>
-          <p:nvPr/>
-        </p:nvSpPr>
-        <p:spPr>
-          <a:xfrm>
-            <a:off x="4892040" y="3163824"/>
-            <a:ext cx="1737360" cy="676656"/>
-          </a:xfrm>
-          <a:prstGeom prst="rect">
-            <a:avLst/>
-          </a:prstGeom>
-          <a:noFill/>
-          <a:ln/>
-        </p:spPr>
-        <p:txBody>
-          <a:bodyPr wrap="square" lIns="0" tIns="0" rIns="0" bIns="0" rtlCol="0" anchor="ctr"/>
-          <a:lstStyle/>
-          <a:p>
-            <a:pPr marL="0" indent="0">
-              <a:lnSpc>
-                <a:spcPct val="135000"/>
-              </a:lnSpc>
-              <a:buNone/>
-            </a:pPr>
-            <a:r>
-              <a:rPr lang="en-US" sz="1000" dirty="0">
-                <a:solidFill>
-                  <a:srgbClr val="AAAAAA"/>
-                </a:solidFill>
-                <a:latin typeface="Calibri" pitchFamily="34" charset="0"/>
-                <a:ea typeface="Calibri" pitchFamily="34" charset="-122"/>
-                <a:cs typeface="Calibri" pitchFamily="34" charset="-120"/>
-              </a:rPr>
-              <a:t>RAM 3+ GB · Android 8+ · Google Play Services WAJIB (FCM) · foreground service GPS. Cakupan tracking ~95-99% walau app tertutup.</a:t>
-            </a:r>
-          </a:p>
-        </p:txBody>
-      </p:sp>
-      <p:sp>
-        <p:nvSpPr>
-          <p:cNvPr id="34" name="Shape 25"/>
-          <p:cNvSpPr/>
-          <p:nvPr/>
-        </p:nvSpPr>
-        <p:spPr>
-          <a:xfrm>
-            <a:off x="6885432" y="2761488"/>
-            <a:ext cx="2011680" cy="1170432"/>
-          </a:xfrm>
-          <a:prstGeom prst="roundRect">
-            <a:avLst>
-              <a:gd name="adj" fmla="val 6250"/>
-            </a:avLst>
-          </a:prstGeom>
-          <a:solidFill>
-            <a:srgbClr val="FFFFFF">
-              <a:alpha val="8000"/>
-            </a:srgbClr>
-          </a:solidFill>
-          <a:ln w="12700">
-            <a:solidFill>
-              <a:srgbClr val="FFFFFF">
-                <a:alpha val="15000"/>
-              </a:srgbClr>
-            </a:solidFill>
-            <a:prstDash val="solid"/>
-          </a:ln>
-        </p:spPr>
-        <p:txBody>
-          <a:bodyPr/>
-          <a:p/>
-        </p:txBody>
-      </p:sp>
-      <p:pic>
-        <p:nvPicPr>
-          <p:cNvPr id="35" name="Image 7" descr="preencoded.png"/>
-          <p:cNvPicPr>
-            <a:picLocks noChangeAspect="1"/>
-          </p:cNvPicPr>
-          <p:nvPr/>
-        </p:nvPicPr>
-        <p:blipFill>
-          <a:blip r:embed="rId10"/>
-          <a:stretch>
-            <a:fillRect/>
-          </a:stretch>
-        </p:blipFill>
-        <p:spPr>
-          <a:xfrm>
-            <a:off x="7050024" y="2871216"/>
-            <a:ext cx="219456" cy="219456"/>
-          </a:xfrm>
-          <a:prstGeom prst="rect">
-            <a:avLst/>
-          </a:prstGeom>
-        </p:spPr>
-      </p:pic>
-      <p:sp>
-        <p:nvSpPr>
-          <p:cNvPr id="36" name="Text 26"/>
-          <p:cNvSpPr/>
-          <p:nvPr/>
-        </p:nvSpPr>
-        <p:spPr>
-          <a:xfrm>
-            <a:off x="7342632" y="2852928"/>
-            <a:ext cx="1444752" cy="256032"/>
-          </a:xfrm>
-          <a:prstGeom prst="rect">
-            <a:avLst/>
-          </a:prstGeom>
-          <a:noFill/>
-          <a:ln/>
-        </p:spPr>
-        <p:txBody>
-          <a:bodyPr wrap="square" lIns="0" tIns="0" rIns="0" bIns="0" rtlCol="0" anchor="ctr"/>
-          <a:lstStyle/>
-          <a:p>
-            <a:pPr marL="0" indent="0">
-              <a:buNone/>
-            </a:pPr>
-            <a:r>
-              <a:rPr lang="en-US" sz="1300" b="1" dirty="0">
-                <a:solidFill>
-                  <a:srgbClr val="E2C97E"/>
-                </a:solidFill>
-                <a:latin typeface="Cambria" pitchFamily="34" charset="0"/>
-                <a:ea typeface="Cambria" pitchFamily="34" charset="-122"/>
-                <a:cs typeface="Cambria" pitchFamily="34" charset="-120"/>
-              </a:rPr>
-              <a:t>Deployment &amp; Ops</a:t>
-            </a:r>
-          </a:p>
-        </p:txBody>
-      </p:sp>
-      <p:sp>
-        <p:nvSpPr>
-          <p:cNvPr id="37" name="Text 27"/>
-          <p:cNvSpPr/>
-          <p:nvPr/>
-        </p:nvSpPr>
-        <p:spPr>
-          <a:xfrm>
-            <a:off x="7050024" y="3163824"/>
-            <a:ext cx="1737360" cy="676656"/>
-          </a:xfrm>
-          <a:prstGeom prst="rect">
-            <a:avLst/>
-          </a:prstGeom>
-          <a:noFill/>
-          <a:ln/>
-        </p:spPr>
-        <p:txBody>
-          <a:bodyPr wrap="square" lIns="0" tIns="0" rIns="0" bIns="0" rtlCol="0" anchor="ctr"/>
-          <a:lstStyle/>
-          <a:p>
-            <a:pPr marL="0" indent="0">
-              <a:lnSpc>
-                <a:spcPct val="135000"/>
-              </a:lnSpc>
-              <a:buNone/>
-            </a:pPr>
-            <a:r>
-              <a:rPr lang="en-US" sz="1000" dirty="0">
-                <a:solidFill>
-                  <a:srgbClr val="AAAAAA"/>
-                </a:solidFill>
-                <a:latin typeface="Calibri" pitchFamily="34" charset="0"/>
-                <a:ea typeface="Calibri" pitchFamily="34" charset="-122"/>
-                <a:cs typeface="Calibri" pitchFamily="34" charset="-120"/>
-              </a:rPr>
-              <a:t>Docker Compose · Caddy TLS 1.3 + HTTP/3 · PostgreSQL 16 · Backup harian retensi 30 hari · TLS 1.3 Let's Encrypt auto-renew.</a:t>
-            </a:r>
-          </a:p>
-        </p:txBody>
-      </p:sp>
-      <p:sp>
-        <p:nvSpPr>
-          <p:cNvPr id="38" name="Shape 28"/>
-          <p:cNvSpPr/>
-          <p:nvPr/>
-        </p:nvSpPr>
-        <p:spPr>
-          <a:xfrm>
-            <a:off x="411480" y="4078224"/>
-            <a:ext cx="2011680" cy="749808"/>
-          </a:xfrm>
-          <a:prstGeom prst="roundRect">
-            <a:avLst>
-              <a:gd name="adj" fmla="val 9756"/>
-            </a:avLst>
-          </a:prstGeom>
-          <a:solidFill>
-            <a:srgbClr val="FFFFFF">
-              <a:alpha val="10000"/>
-            </a:srgbClr>
-          </a:solidFill>
-          <a:ln w="12700">
-            <a:solidFill>
-              <a:srgbClr val="FFFFFF">
-                <a:alpha val="15000"/>
-              </a:srgbClr>
-            </a:solidFill>
-            <a:prstDash val="solid"/>
-          </a:ln>
-        </p:spPr>
-        <p:txBody>
-          <a:bodyPr/>
-          <a:p/>
-        </p:txBody>
-      </p:sp>
-      <p:sp>
-        <p:nvSpPr>
-          <p:cNvPr id="39" name="Text 29"/>
-          <p:cNvSpPr/>
-          <p:nvPr/>
-        </p:nvSpPr>
-        <p:spPr>
-          <a:xfrm>
-            <a:off x="411480" y="4114800"/>
-            <a:ext cx="2011680" cy="347472"/>
-          </a:xfrm>
-          <a:prstGeom prst="rect">
-            <a:avLst/>
-          </a:prstGeom>
-          <a:noFill/>
-          <a:ln/>
-        </p:spPr>
-        <p:txBody>
-          <a:bodyPr wrap="square" lIns="0" tIns="0" rIns="0" bIns="0" rtlCol="0" anchor="ctr"/>
-          <a:lstStyle/>
-          <a:p>
-            <a:pPr marL="0" indent="0" algn="ctr">
-              <a:buNone/>
-            </a:pPr>
-            <a:r>
-              <a:rPr lang="en-US" sz="2200" b="1" dirty="0">
-                <a:solidFill>
-                  <a:srgbClr val="E2C97E"/>
-                </a:solidFill>
-                <a:latin typeface="Cambria" pitchFamily="34" charset="0"/>
-                <a:ea typeface="Cambria" pitchFamily="34" charset="-122"/>
-                <a:cs typeface="Cambria" pitchFamily="34" charset="-120"/>
-              </a:rPr>
-              <a:t>Rp 25 jt</a:t>
-            </a:r>
-          </a:p>
-        </p:txBody>
-      </p:sp>
-      <p:sp>
-        <p:nvSpPr>
-          <p:cNvPr id="40" name="Text 30"/>
-          <p:cNvSpPr/>
-          <p:nvPr/>
-        </p:nvSpPr>
-        <p:spPr>
-          <a:xfrm>
-            <a:off x="411480" y="4462272"/>
-            <a:ext cx="2011680" cy="274320"/>
-          </a:xfrm>
-          <a:prstGeom prst="rect">
-            <a:avLst/>
-          </a:prstGeom>
-          <a:noFill/>
-          <a:ln/>
-        </p:spPr>
-        <p:txBody>
-          <a:bodyPr wrap="square" lIns="0" tIns="0" rIns="0" bIns="0" rtlCol="0" anchor="ctr"/>
-          <a:lstStyle/>
-          <a:p>
-            <a:pPr marL="0" indent="0" algn="ctr">
-              <a:buNone/>
-            </a:pPr>
-            <a:r>
-              <a:rPr lang="en-US" sz="1000" dirty="0">
-                <a:solidFill>
-                  <a:srgbClr val="999999"/>
-                </a:solidFill>
-                <a:latin typeface="Calibri" pitchFamily="34" charset="0"/>
-                <a:ea typeface="Calibri" pitchFamily="34" charset="-122"/>
-                <a:cs typeface="Calibri" pitchFamily="34" charset="-120"/>
-              </a:rPr>
-              <a:t>CapEx 1 Cabang (6 petugas)</a:t>
-            </a:r>
-          </a:p>
-        </p:txBody>
-      </p:sp>
-      <p:sp>
-        <p:nvSpPr>
-          <p:cNvPr id="41" name="Shape 31"/>
-          <p:cNvSpPr/>
-          <p:nvPr/>
-        </p:nvSpPr>
-        <p:spPr>
-          <a:xfrm>
-            <a:off x="2569464" y="4078224"/>
-            <a:ext cx="2011680" cy="749808"/>
-          </a:xfrm>
-          <a:prstGeom prst="roundRect">
-            <a:avLst>
-              <a:gd name="adj" fmla="val 9756"/>
-            </a:avLst>
-          </a:prstGeom>
-          <a:solidFill>
-            <a:srgbClr val="FFFFFF">
-              <a:alpha val="10000"/>
-            </a:srgbClr>
-          </a:solidFill>
-          <a:ln w="12700">
-            <a:solidFill>
-              <a:srgbClr val="FFFFFF">
-                <a:alpha val="15000"/>
-              </a:srgbClr>
-            </a:solidFill>
-            <a:prstDash val="solid"/>
-          </a:ln>
-        </p:spPr>
-        <p:txBody>
-          <a:bodyPr/>
-          <a:p/>
-        </p:txBody>
-      </p:sp>
-      <p:sp>
-        <p:nvSpPr>
-          <p:cNvPr id="42" name="Text 32"/>
-          <p:cNvSpPr/>
-          <p:nvPr/>
-        </p:nvSpPr>
-        <p:spPr>
-          <a:xfrm>
-            <a:off x="2569464" y="4114800"/>
-            <a:ext cx="2011680" cy="347472"/>
-          </a:xfrm>
-          <a:prstGeom prst="rect">
-            <a:avLst/>
-          </a:prstGeom>
-          <a:noFill/>
-          <a:ln/>
-        </p:spPr>
-        <p:txBody>
-          <a:bodyPr wrap="square" lIns="0" tIns="0" rIns="0" bIns="0" rtlCol="0" anchor="ctr"/>
-          <a:lstStyle/>
-          <a:p>
-            <a:pPr marL="0" indent="0" algn="ctr">
-              <a:buNone/>
-            </a:pPr>
-            <a:r>
-              <a:rPr lang="en-US" sz="2200" b="1" dirty="0">
-                <a:solidFill>
-                  <a:srgbClr val="E2C97E"/>
-                </a:solidFill>
-                <a:latin typeface="Cambria" pitchFamily="34" charset="0"/>
-                <a:ea typeface="Cambria" pitchFamily="34" charset="-122"/>
-                <a:cs typeface="Cambria" pitchFamily="34" charset="-120"/>
-              </a:rPr>
-              <a:t>Rp 3,6 jt</a:t>
-            </a:r>
-          </a:p>
-        </p:txBody>
-      </p:sp>
-      <p:sp>
-        <p:nvSpPr>
-          <p:cNvPr id="43" name="Text 33"/>
-          <p:cNvSpPr/>
-          <p:nvPr/>
-        </p:nvSpPr>
-        <p:spPr>
-          <a:xfrm>
-            <a:off x="2569464" y="4462272"/>
-            <a:ext cx="2011680" cy="274320"/>
-          </a:xfrm>
-          <a:prstGeom prst="rect">
-            <a:avLst/>
-          </a:prstGeom>
-          <a:noFill/>
-          <a:ln/>
-        </p:spPr>
-        <p:txBody>
-          <a:bodyPr wrap="square" lIns="0" tIns="0" rIns="0" bIns="0" rtlCol="0" anchor="ctr"/>
-          <a:lstStyle/>
-          <a:p>
-            <a:pPr marL="0" indent="0" algn="ctr">
-              <a:buNone/>
-            </a:pPr>
-            <a:r>
-              <a:rPr lang="en-US" sz="1000" dirty="0">
-                <a:solidFill>
-                  <a:srgbClr val="999999"/>
-                </a:solidFill>
-                <a:latin typeface="Calibri" pitchFamily="34" charset="0"/>
-                <a:ea typeface="Calibri" pitchFamily="34" charset="-122"/>
-                <a:cs typeface="Calibri" pitchFamily="34" charset="-120"/>
-              </a:rPr>
-              <a:t>OpEx Server / Tahun</a:t>
-            </a:r>
-          </a:p>
-        </p:txBody>
-      </p:sp>
-      <p:sp>
-        <p:nvSpPr>
-          <p:cNvPr id="44" name="Shape 34"/>
-          <p:cNvSpPr/>
-          <p:nvPr/>
-        </p:nvSpPr>
-        <p:spPr>
-          <a:xfrm>
-            <a:off x="4727448" y="4078224"/>
-            <a:ext cx="2011680" cy="749808"/>
-          </a:xfrm>
-          <a:prstGeom prst="roundRect">
-            <a:avLst>
-              <a:gd name="adj" fmla="val 9756"/>
-            </a:avLst>
-          </a:prstGeom>
-          <a:solidFill>
-            <a:srgbClr val="FFFFFF">
-              <a:alpha val="10000"/>
-            </a:srgbClr>
-          </a:solidFill>
-          <a:ln w="12700">
-            <a:solidFill>
-              <a:srgbClr val="FFFFFF">
-                <a:alpha val="15000"/>
-              </a:srgbClr>
-            </a:solidFill>
-            <a:prstDash val="solid"/>
-          </a:ln>
-        </p:spPr>
-        <p:txBody>
-          <a:bodyPr/>
-          <a:p/>
-        </p:txBody>
-      </p:sp>
-      <p:sp>
-        <p:nvSpPr>
-          <p:cNvPr id="45" name="Text 35"/>
-          <p:cNvSpPr/>
-          <p:nvPr/>
-        </p:nvSpPr>
-        <p:spPr>
-          <a:xfrm>
-            <a:off x="4727448" y="4114800"/>
-            <a:ext cx="2011680" cy="347472"/>
-          </a:xfrm>
-          <a:prstGeom prst="rect">
-            <a:avLst/>
-          </a:prstGeom>
-          <a:noFill/>
-          <a:ln/>
-        </p:spPr>
-        <p:txBody>
-          <a:bodyPr wrap="square" lIns="0" tIns="0" rIns="0" bIns="0" rtlCol="0" anchor="ctr"/>
-          <a:lstStyle/>
-          <a:p>
-            <a:pPr marL="0" indent="0" algn="ctr">
-              <a:buNone/>
-            </a:pPr>
-            <a:r>
-              <a:rPr lang="en-US" sz="2200" b="1" dirty="0">
-                <a:solidFill>
-                  <a:srgbClr val="E2C97E"/>
-                </a:solidFill>
-                <a:latin typeface="Cambria" pitchFamily="34" charset="0"/>
-                <a:ea typeface="Cambria" pitchFamily="34" charset="-122"/>
-                <a:cs typeface="Cambria" pitchFamily="34" charset="-120"/>
-              </a:rPr>
-              <a:t>On-Prem</a:t>
-            </a:r>
-          </a:p>
-        </p:txBody>
-      </p:sp>
-      <p:sp>
-        <p:nvSpPr>
-          <p:cNvPr id="46" name="Text 36"/>
-          <p:cNvSpPr/>
-          <p:nvPr/>
-        </p:nvSpPr>
-        <p:spPr>
-          <a:xfrm>
-            <a:off x="4727448" y="4462272"/>
-            <a:ext cx="2011680" cy="274320"/>
-          </a:xfrm>
-          <a:prstGeom prst="rect">
-            <a:avLst/>
-          </a:prstGeom>
-          <a:noFill/>
-          <a:ln/>
-        </p:spPr>
-        <p:txBody>
-          <a:bodyPr wrap="square" lIns="0" tIns="0" rIns="0" bIns="0" rtlCol="0" anchor="ctr"/>
-          <a:lstStyle/>
-          <a:p>
-            <a:pPr marL="0" indent="0" algn="ctr">
-              <a:buNone/>
-            </a:pPr>
-            <a:r>
-              <a:rPr lang="en-US" sz="1000" dirty="0">
-                <a:solidFill>
-                  <a:srgbClr val="999999"/>
-                </a:solidFill>
-                <a:latin typeface="Calibri" pitchFamily="34" charset="0"/>
-                <a:ea typeface="Calibri" pitchFamily="34" charset="-122"/>
-                <a:cs typeface="Calibri" pitchFamily="34" charset="-120"/>
-              </a:rPr>
-              <a:t>Data Center BSN</a:t>
-            </a:r>
-          </a:p>
-        </p:txBody>
-      </p:sp>
-      <p:sp>
-        <p:nvSpPr>
-          <p:cNvPr id="47" name="Shape 37"/>
-          <p:cNvSpPr/>
-          <p:nvPr/>
-        </p:nvSpPr>
-        <p:spPr>
-          <a:xfrm>
-            <a:off x="6885432" y="4078224"/>
-            <a:ext cx="2011680" cy="749808"/>
-          </a:xfrm>
-          <a:prstGeom prst="roundRect">
-            <a:avLst>
-              <a:gd name="adj" fmla="val 9756"/>
-            </a:avLst>
-          </a:prstGeom>
-          <a:solidFill>
-            <a:srgbClr val="FFFFFF">
-              <a:alpha val="10000"/>
-            </a:srgbClr>
-          </a:solidFill>
-          <a:ln w="12700">
-            <a:solidFill>
-              <a:srgbClr val="FFFFFF">
-                <a:alpha val="15000"/>
-              </a:srgbClr>
-            </a:solidFill>
-            <a:prstDash val="solid"/>
-          </a:ln>
-        </p:spPr>
-        <p:txBody>
-          <a:bodyPr/>
-          <a:p/>
-        </p:txBody>
-      </p:sp>
-      <p:sp>
-        <p:nvSpPr>
-          <p:cNvPr id="48" name="Text 38"/>
-          <p:cNvSpPr/>
-          <p:nvPr/>
-        </p:nvSpPr>
-        <p:spPr>
-          <a:xfrm>
-            <a:off x="6885432" y="4114800"/>
-            <a:ext cx="2011680" cy="347472"/>
-          </a:xfrm>
-          <a:prstGeom prst="rect">
-            <a:avLst/>
-          </a:prstGeom>
-          <a:noFill/>
-          <a:ln/>
-        </p:spPr>
-        <p:txBody>
-          <a:bodyPr wrap="square" lIns="0" tIns="0" rIns="0" bIns="0" rtlCol="0" anchor="ctr"/>
-          <a:lstStyle/>
-          <a:p>
-            <a:pPr marL="0" indent="0" algn="ctr">
-              <a:buNone/>
-            </a:pPr>
-            <a:r>
-              <a:rPr lang="en-US" sz="2200" b="1" dirty="0">
-                <a:solidFill>
-                  <a:srgbClr val="E2C97E"/>
-                </a:solidFill>
-                <a:latin typeface="Cambria" pitchFamily="34" charset="0"/>
-                <a:ea typeface="Cambria" pitchFamily="34" charset="-122"/>
-                <a:cs typeface="Cambria" pitchFamily="34" charset="-120"/>
-              </a:rPr>
-              <a:t>30 Hari</a:t>
-            </a:r>
-          </a:p>
-        </p:txBody>
-      </p:sp>
-      <p:sp>
-        <p:nvSpPr>
-          <p:cNvPr id="49" name="Text 39"/>
-          <p:cNvSpPr/>
-          <p:nvPr/>
-        </p:nvSpPr>
-        <p:spPr>
-          <a:xfrm>
-            <a:off x="6885432" y="4462272"/>
-            <a:ext cx="2011680" cy="274320"/>
-          </a:xfrm>
-          <a:prstGeom prst="rect">
-            <a:avLst/>
-          </a:prstGeom>
-          <a:noFill/>
-          <a:ln/>
-        </p:spPr>
-        <p:txBody>
-          <a:bodyPr wrap="square" lIns="0" tIns="0" rIns="0" bIns="0" rtlCol="0" anchor="ctr"/>
-          <a:lstStyle/>
-          <a:p>
-            <a:pPr marL="0" indent="0" algn="ctr">
-              <a:buNone/>
-            </a:pPr>
-            <a:r>
-              <a:rPr lang="en-US" sz="1000" dirty="0">
-                <a:solidFill>
-                  <a:srgbClr val="999999"/>
-                </a:solidFill>
-                <a:latin typeface="Calibri" pitchFamily="34" charset="0"/>
-                <a:ea typeface="Calibri" pitchFamily="34" charset="-122"/>
-                <a:cs typeface="Calibri" pitchFamily="34" charset="-120"/>
-              </a:rPr>
-              <a:t>Retensi Backup</a:t>
-            </a:r>
-          </a:p>
-        </p:txBody>
-      </p:sp>
-      <p:sp>
-        <p:nvSpPr>
-          <p:cNvPr id="50" name="Text 40"/>
-          <p:cNvSpPr/>
-          <p:nvPr/>
-        </p:nvSpPr>
-        <p:spPr>
-          <a:xfrm>
-            <a:off x="8046720" y="4919472"/>
-            <a:ext cx="1005840" cy="201168"/>
-          </a:xfrm>
-          <a:prstGeom prst="rect">
-            <a:avLst/>
-          </a:prstGeom>
-          <a:noFill/>
-          <a:ln/>
-        </p:spPr>
-        <p:txBody>
-          <a:bodyPr wrap="square" rtlCol="0" anchor="ctr"/>
-          <a:lstStyle/>
-          <a:p>
-            <a:pPr marL="0" indent="0" algn="r">
-              <a:buNone/>
-            </a:pPr>
-            <a:r>
-              <a:rPr lang="en-US" sz="800" b="1" dirty="0">
-                <a:solidFill>
-                  <a:srgbClr val="FFFFFF">
-                    <a:alpha val="45000"/>
-                  </a:srgbClr>
-                </a:solidFill>
-                <a:latin typeface="Calibri" pitchFamily="34" charset="0"/>
-                <a:ea typeface="Calibri" pitchFamily="34" charset="-122"/>
-                <a:cs typeface="Calibri" pitchFamily="34" charset="-120"/>
-              </a:rPr>
-              <a:t>12 / 15</a:t>
-            </a:r>
-          </a:p>
-        </p:txBody>
-      </p:sp>
-    </p:spTree>
-  </p:cSld>
-  <p:clrMapOvr>
-    <a:masterClrMapping/>
-  </p:clrMapOvr>
-</p:sld>
-</file>
-
-<file path=ppt/slides/slide13.xml><?xml version="1.0" encoding="utf-8"?>
 <p:sld xmlns:a="http://schemas.openxmlformats.org/drawingml/2006/main" xmlns:r="http://schemas.openxmlformats.org/officeDocument/2006/relationships" xmlns:p="http://schemas.openxmlformats.org/presentationml/2006/main">
   <p:cSld name="Slide 12">
     <p:bg>
@@ -9578,7 +7825,7 @@
 </p:sld>
 </file>
 
-<file path=ppt/slides/slide14.xml><?xml version="1.0" encoding="utf-8"?>
+<file path=ppt/slides/slide13.xml><?xml version="1.0" encoding="utf-8"?>
 <p:sld xmlns:a="http://schemas.openxmlformats.org/drawingml/2006/main" xmlns:r="http://schemas.openxmlformats.org/officeDocument/2006/relationships" xmlns:p="http://schemas.openxmlformats.org/presentationml/2006/main">
   <p:cSld name="Slide 13">
     <p:bg>
@@ -12000,7 +10247,7 @@
 </p:sld>
 </file>
 
-<file path=ppt/slides/slide15.xml><?xml version="1.0" encoding="utf-8"?>
+<file path=ppt/slides/slide14.xml><?xml version="1.0" encoding="utf-8"?>
 <p:sld xmlns:a="http://schemas.openxmlformats.org/drawingml/2006/main" xmlns:r="http://schemas.openxmlformats.org/officeDocument/2006/relationships" xmlns:p="http://schemas.openxmlformats.org/presentationml/2006/main">
   <p:cSld name="Slide 14">
     <p:bg>
@@ -13116,6 +11363,1759 @@
               <a:t>15 / 15</a:t>
             </a:r>
             <a:endParaRPr lang="en-US" sz="800" dirty="0"/>
+          </a:p>
+        </p:txBody>
+      </p:sp>
+    </p:spTree>
+  </p:cSld>
+  <p:clrMapOvr>
+    <a:masterClrMapping/>
+  </p:clrMapOvr>
+</p:sld>
+</file>
+
+<file path=ppt/slides/slide15.xml><?xml version="1.0" encoding="utf-8"?>
+<p:sld xmlns:a="http://schemas.openxmlformats.org/drawingml/2006/main" xmlns:p="http://schemas.openxmlformats.org/presentationml/2006/main" xmlns:r="http://schemas.openxmlformats.org/officeDocument/2006/relationships">
+  <p:cSld>
+    <p:spTree>
+      <p:nvGrpSpPr>
+        <p:cNvPr id="1" name=""/>
+        <p:cNvGrpSpPr/>
+        <p:nvPr/>
+      </p:nvGrpSpPr>
+      <p:grpSpPr/>
+      <p:sp>
+        <p:nvSpPr>
+          <p:cNvPr id="2" name="Text 0"/>
+          <p:cNvSpPr/>
+          <p:nvPr/>
+        </p:nvSpPr>
+        <p:spPr>
+          <a:xfrm>
+            <a:off x="502920" y="256032"/>
+            <a:ext cx="7772400" cy="658368"/>
+          </a:xfrm>
+          <a:prstGeom prst="rect">
+            <a:avLst/>
+          </a:prstGeom>
+          <a:noFill/>
+          <a:ln/>
+        </p:spPr>
+        <p:txBody>
+          <a:bodyPr wrap="square" lIns="0" tIns="0" rIns="0" bIns="0" rtlCol="0" anchor="b"/>
+          <a:lstStyle/>
+          <a:p>
+            <a:pPr marL="0" indent="0">
+              <a:buNone/>
+            </a:pPr>
+            <a:r>
+              <a:rPr lang="en-US" sz="2600" b="1" dirty="0">
+                <a:solidFill>
+                  <a:srgbClr val="FFFFFF"/>
+                </a:solidFill>
+                <a:latin typeface="Cambria" pitchFamily="34" charset="0"/>
+                <a:ea typeface="Cambria" pitchFamily="34" charset="-122"/>
+                <a:cs typeface="Cambria" pitchFamily="34" charset="-120"/>
+              </a:rPr>
+              <a:t>Spesifikasi Infrastruktur Sistem</a:t>
+            </a:r>
+          </a:p>
+        </p:txBody>
+      </p:sp>
+      <p:sp>
+        <p:nvSpPr>
+          <p:cNvPr id="3" name="Text 1"/>
+          <p:cNvSpPr/>
+          <p:nvPr/>
+        </p:nvSpPr>
+        <p:spPr>
+          <a:xfrm>
+            <a:off x="502920" y="237744"/>
+            <a:ext cx="8229600" cy="201168"/>
+          </a:xfrm>
+          <a:prstGeom prst="rect">
+            <a:avLst/>
+          </a:prstGeom>
+          <a:noFill/>
+          <a:ln/>
+        </p:spPr>
+        <p:txBody>
+          <a:bodyPr wrap="square" lIns="0" tIns="0" rIns="0" bIns="0" rtlCol="0" anchor="t"/>
+          <a:lstStyle/>
+          <a:p>
+            <a:pPr marL="0" indent="0">
+              <a:buNone/>
+            </a:pPr>
+            <a:r>
+              <a:rPr lang="en-US" sz="800" b="1" kern="0" spc="500" dirty="0">
+                <a:solidFill>
+                  <a:srgbClr val="E2C97E"/>
+                </a:solidFill>
+                <a:latin typeface="Calibri" pitchFamily="34" charset="0"/>
+                <a:ea typeface="Calibri" pitchFamily="34" charset="-122"/>
+                <a:cs typeface="Calibri" pitchFamily="34" charset="-120"/>
+              </a:rPr>
+              <a:t>DEPLOYMENT &amp; PERANGKAT</a:t>
+            </a:r>
+          </a:p>
+        </p:txBody>
+      </p:sp>
+      <p:sp>
+        <p:nvSpPr>
+          <p:cNvPr id="4" name="Shape 2"/>
+          <p:cNvSpPr/>
+          <p:nvPr/>
+        </p:nvSpPr>
+        <p:spPr>
+          <a:xfrm>
+            <a:off x="502920" y="932688"/>
+            <a:ext cx="8138160" cy="18288"/>
+          </a:xfrm>
+          <a:prstGeom prst="rect">
+            <a:avLst/>
+          </a:prstGeom>
+          <a:solidFill>
+            <a:srgbClr val="E2C97E">
+              <a:alpha val="35000"/>
+            </a:srgbClr>
+          </a:solidFill>
+          <a:ln w="12700">
+            <a:solidFill>
+              <a:srgbClr val="FFFFFF">
+                <a:alpha val="0"/>
+              </a:srgbClr>
+            </a:solidFill>
+            <a:prstDash val="solid"/>
+          </a:ln>
+        </p:spPr>
+        <p:txBody>
+          <a:bodyPr/>
+          <a:p/>
+        </p:txBody>
+      </p:sp>
+      <p:sp>
+        <p:nvSpPr>
+          <p:cNvPr id="5" name="Text 3"/>
+          <p:cNvSpPr/>
+          <p:nvPr/>
+        </p:nvSpPr>
+        <p:spPr>
+          <a:xfrm>
+            <a:off x="502920" y="1024128"/>
+            <a:ext cx="8138160" cy="347472"/>
+          </a:xfrm>
+          <a:prstGeom prst="rect">
+            <a:avLst/>
+          </a:prstGeom>
+          <a:noFill/>
+          <a:ln/>
+        </p:spPr>
+        <p:txBody>
+          <a:bodyPr wrap="square" lIns="0" tIns="0" rIns="0" bIns="0" rtlCol="0" anchor="ctr"/>
+          <a:lstStyle/>
+          <a:p>
+            <a:pPr marL="0" indent="0">
+              <a:buNone/>
+            </a:pPr>
+            <a:r>
+              <a:rPr lang="en-US" sz="1050" dirty="0">
+                <a:solidFill>
+                  <a:srgbClr val="BBBBBB"/>
+                </a:solidFill>
+                <a:latin typeface="Calibri" pitchFamily="34" charset="0"/>
+                <a:ea typeface="Calibri" pitchFamily="34" charset="-122"/>
+                <a:cs typeface="Calibri" pitchFamily="34" charset="-120"/>
+              </a:rPr>
+              <a:t>Tiga komponen perangkat menopang BSN Lacak: server backend, workstation supervisor, dan device petugas lapangan. Deployment on-premise di DC BSN dengan footprint minimal 2 GB VPS untuk pilot, scaling jelas hingga skala enterprise multi-cabang.</a:t>
+            </a:r>
+          </a:p>
+        </p:txBody>
+      </p:sp>
+      <p:sp>
+        <p:nvSpPr>
+          <p:cNvPr id="6" name="Shape 4"/>
+          <p:cNvSpPr/>
+          <p:nvPr/>
+        </p:nvSpPr>
+        <p:spPr>
+          <a:xfrm>
+            <a:off x="411480" y="1481328"/>
+            <a:ext cx="2011680" cy="1170432"/>
+          </a:xfrm>
+          <a:prstGeom prst="roundRect">
+            <a:avLst>
+              <a:gd name="adj" fmla="val 6250"/>
+            </a:avLst>
+          </a:prstGeom>
+          <a:solidFill>
+            <a:srgbClr val="FFFFFF">
+              <a:alpha val="8000"/>
+            </a:srgbClr>
+          </a:solidFill>
+          <a:ln w="12700">
+            <a:solidFill>
+              <a:srgbClr val="FFFFFF">
+                <a:alpha val="15000"/>
+              </a:srgbClr>
+            </a:solidFill>
+            <a:prstDash val="solid"/>
+          </a:ln>
+        </p:spPr>
+        <p:txBody>
+          <a:bodyPr/>
+          <a:p/>
+        </p:txBody>
+      </p:sp>
+      <p:pic>
+        <p:nvPicPr>
+          <p:cNvPr id="7" name="Image 0" descr="preencoded.png"/>
+          <p:cNvPicPr>
+            <a:picLocks noChangeAspect="1"/>
+          </p:cNvPicPr>
+          <p:nvPr/>
+        </p:nvPicPr>
+        <p:blipFill>
+          <a:blip r:embed="rId2"/>
+          <a:stretch>
+            <a:fillRect/>
+          </a:stretch>
+        </p:blipFill>
+        <p:spPr>
+          <a:xfrm>
+            <a:off x="576072" y="1591056"/>
+            <a:ext cx="219456" cy="219456"/>
+          </a:xfrm>
+          <a:prstGeom prst="rect">
+            <a:avLst/>
+          </a:prstGeom>
+        </p:spPr>
+      </p:pic>
+      <p:sp>
+        <p:nvSpPr>
+          <p:cNvPr id="8" name="Text 5"/>
+          <p:cNvSpPr/>
+          <p:nvPr/>
+        </p:nvSpPr>
+        <p:spPr>
+          <a:xfrm>
+            <a:off x="868680" y="1572768"/>
+            <a:ext cx="1444752" cy="256032"/>
+          </a:xfrm>
+          <a:prstGeom prst="rect">
+            <a:avLst/>
+          </a:prstGeom>
+          <a:noFill/>
+          <a:ln/>
+        </p:spPr>
+        <p:txBody>
+          <a:bodyPr wrap="square" lIns="0" tIns="0" rIns="0" bIns="0" rtlCol="0" anchor="ctr"/>
+          <a:lstStyle/>
+          <a:p>
+            <a:pPr marL="0" indent="0">
+              <a:buNone/>
+            </a:pPr>
+            <a:r>
+              <a:rPr lang="en-US" sz="1300" b="1" dirty="0">
+                <a:solidFill>
+                  <a:srgbClr val="E2C97E"/>
+                </a:solidFill>
+                <a:latin typeface="Cambria" pitchFamily="34" charset="0"/>
+                <a:ea typeface="Cambria" pitchFamily="34" charset="-122"/>
+                <a:cs typeface="Cambria" pitchFamily="34" charset="-120"/>
+              </a:rPr>
+              <a:t>Server — Demo/Pilot</a:t>
+            </a:r>
+          </a:p>
+        </p:txBody>
+      </p:sp>
+      <p:sp>
+        <p:nvSpPr>
+          <p:cNvPr id="9" name="Text 6"/>
+          <p:cNvSpPr/>
+          <p:nvPr/>
+        </p:nvSpPr>
+        <p:spPr>
+          <a:xfrm>
+            <a:off x="576072" y="1883664"/>
+            <a:ext cx="1737360" cy="676656"/>
+          </a:xfrm>
+          <a:prstGeom prst="rect">
+            <a:avLst/>
+          </a:prstGeom>
+          <a:noFill/>
+          <a:ln/>
+        </p:spPr>
+        <p:txBody>
+          <a:bodyPr wrap="square" lIns="0" tIns="0" rIns="0" bIns="0" rtlCol="0" anchor="ctr"/>
+          <a:lstStyle/>
+          <a:p>
+            <a:pPr marL="0" indent="0">
+              <a:lnSpc>
+                <a:spcPct val="135000"/>
+              </a:lnSpc>
+              <a:buNone/>
+            </a:pPr>
+            <a:r>
+              <a:rPr lang="en-US" sz="1000" dirty="0">
+                <a:solidFill>
+                  <a:srgbClr val="AAAAAA"/>
+                </a:solidFill>
+                <a:latin typeface="Calibri" pitchFamily="34" charset="0"/>
+                <a:ea typeface="Calibri" pitchFamily="34" charset="-122"/>
+                <a:cs typeface="Calibri" pitchFamily="34" charset="-120"/>
+              </a:rPr>
+              <a:t>2 GB RAM · 1-2 vCPU · 30 GB SSD · Bandwidth 1 TB/bulan. Cocok POC ≤ 10 petugas aktif, 1 cabang, &lt; 500 nasabah.</a:t>
+            </a:r>
+          </a:p>
+        </p:txBody>
+      </p:sp>
+      <p:sp>
+        <p:nvSpPr>
+          <p:cNvPr id="10" name="Shape 7"/>
+          <p:cNvSpPr/>
+          <p:nvPr/>
+        </p:nvSpPr>
+        <p:spPr>
+          <a:xfrm>
+            <a:off x="2569464" y="1481328"/>
+            <a:ext cx="2011680" cy="1170432"/>
+          </a:xfrm>
+          <a:prstGeom prst="roundRect">
+            <a:avLst>
+              <a:gd name="adj" fmla="val 6250"/>
+            </a:avLst>
+          </a:prstGeom>
+          <a:solidFill>
+            <a:srgbClr val="FFFFFF">
+              <a:alpha val="8000"/>
+            </a:srgbClr>
+          </a:solidFill>
+          <a:ln w="12700">
+            <a:solidFill>
+              <a:srgbClr val="FFFFFF">
+                <a:alpha val="15000"/>
+              </a:srgbClr>
+            </a:solidFill>
+            <a:prstDash val="solid"/>
+          </a:ln>
+        </p:spPr>
+        <p:txBody>
+          <a:bodyPr/>
+          <a:p/>
+        </p:txBody>
+      </p:sp>
+      <p:pic>
+        <p:nvPicPr>
+          <p:cNvPr id="11" name="Image 1" descr="preencoded.png"/>
+          <p:cNvPicPr>
+            <a:picLocks noChangeAspect="1"/>
+          </p:cNvPicPr>
+          <p:nvPr/>
+        </p:nvPicPr>
+        <p:blipFill>
+          <a:blip r:embed="rId3"/>
+          <a:stretch>
+            <a:fillRect/>
+          </a:stretch>
+        </p:blipFill>
+        <p:spPr>
+          <a:xfrm>
+            <a:off x="2734056" y="1591056"/>
+            <a:ext cx="219456" cy="219456"/>
+          </a:xfrm>
+          <a:prstGeom prst="rect">
+            <a:avLst/>
+          </a:prstGeom>
+        </p:spPr>
+      </p:pic>
+      <p:sp>
+        <p:nvSpPr>
+          <p:cNvPr id="12" name="Text 8"/>
+          <p:cNvSpPr/>
+          <p:nvPr/>
+        </p:nvSpPr>
+        <p:spPr>
+          <a:xfrm>
+            <a:off x="3026664" y="1572768"/>
+            <a:ext cx="1444752" cy="256032"/>
+          </a:xfrm>
+          <a:prstGeom prst="rect">
+            <a:avLst/>
+          </a:prstGeom>
+          <a:noFill/>
+          <a:ln/>
+        </p:spPr>
+        <p:txBody>
+          <a:bodyPr wrap="square" lIns="0" tIns="0" rIns="0" bIns="0" rtlCol="0" anchor="ctr"/>
+          <a:lstStyle/>
+          <a:p>
+            <a:pPr marL="0" indent="0">
+              <a:buNone/>
+            </a:pPr>
+            <a:r>
+              <a:rPr lang="en-US" sz="1300" b="1" dirty="0">
+                <a:solidFill>
+                  <a:srgbClr val="E2C97E"/>
+                </a:solidFill>
+                <a:latin typeface="Cambria" pitchFamily="34" charset="0"/>
+                <a:ea typeface="Cambria" pitchFamily="34" charset="-122"/>
+                <a:cs typeface="Cambria" pitchFamily="34" charset="-120"/>
+              </a:rPr>
+              <a:t>Server — Operasional Kecil</a:t>
+            </a:r>
+          </a:p>
+        </p:txBody>
+      </p:sp>
+      <p:sp>
+        <p:nvSpPr>
+          <p:cNvPr id="13" name="Text 9"/>
+          <p:cNvSpPr/>
+          <p:nvPr/>
+        </p:nvSpPr>
+        <p:spPr>
+          <a:xfrm>
+            <a:off x="2734056" y="1883664"/>
+            <a:ext cx="1737360" cy="676656"/>
+          </a:xfrm>
+          <a:prstGeom prst="rect">
+            <a:avLst/>
+          </a:prstGeom>
+          <a:noFill/>
+          <a:ln/>
+        </p:spPr>
+        <p:txBody>
+          <a:bodyPr wrap="square" lIns="0" tIns="0" rIns="0" bIns="0" rtlCol="0" anchor="ctr"/>
+          <a:lstStyle/>
+          <a:p>
+            <a:pPr marL="0" indent="0">
+              <a:lnSpc>
+                <a:spcPct val="135000"/>
+              </a:lnSpc>
+              <a:buNone/>
+            </a:pPr>
+            <a:r>
+              <a:rPr lang="en-US" sz="1000" dirty="0">
+                <a:solidFill>
+                  <a:srgbClr val="AAAAAA"/>
+                </a:solidFill>
+                <a:latin typeface="Calibri" pitchFamily="34" charset="0"/>
+                <a:ea typeface="Calibri" pitchFamily="34" charset="-122"/>
+                <a:cs typeface="Calibri" pitchFamily="34" charset="-120"/>
+              </a:rPr>
+              <a:t>4 GB RAM · 2 vCPU · 60 GB SSD · 2 TB/bulan. Sweet spot 1 kantor cabang: 10-50 petugas, 500-2.000 nasabah.</a:t>
+            </a:r>
+          </a:p>
+        </p:txBody>
+      </p:sp>
+      <p:sp>
+        <p:nvSpPr>
+          <p:cNvPr id="14" name="Shape 10"/>
+          <p:cNvSpPr/>
+          <p:nvPr/>
+        </p:nvSpPr>
+        <p:spPr>
+          <a:xfrm>
+            <a:off x="4727448" y="1481328"/>
+            <a:ext cx="2011680" cy="1170432"/>
+          </a:xfrm>
+          <a:prstGeom prst="roundRect">
+            <a:avLst>
+              <a:gd name="adj" fmla="val 6250"/>
+            </a:avLst>
+          </a:prstGeom>
+          <a:solidFill>
+            <a:srgbClr val="FFFFFF">
+              <a:alpha val="8000"/>
+            </a:srgbClr>
+          </a:solidFill>
+          <a:ln w="12700">
+            <a:solidFill>
+              <a:srgbClr val="FFFFFF">
+                <a:alpha val="15000"/>
+              </a:srgbClr>
+            </a:solidFill>
+            <a:prstDash val="solid"/>
+          </a:ln>
+        </p:spPr>
+        <p:txBody>
+          <a:bodyPr/>
+          <a:p/>
+        </p:txBody>
+      </p:sp>
+      <p:pic>
+        <p:nvPicPr>
+          <p:cNvPr id="15" name="Image 2" descr="preencoded.png"/>
+          <p:cNvPicPr>
+            <a:picLocks noChangeAspect="1"/>
+          </p:cNvPicPr>
+          <p:nvPr/>
+        </p:nvPicPr>
+        <p:blipFill>
+          <a:blip r:embed="rId4"/>
+          <a:stretch>
+            <a:fillRect/>
+          </a:stretch>
+        </p:blipFill>
+        <p:spPr>
+          <a:xfrm>
+            <a:off x="4892040" y="1591056"/>
+            <a:ext cx="219456" cy="219456"/>
+          </a:xfrm>
+          <a:prstGeom prst="rect">
+            <a:avLst/>
+          </a:prstGeom>
+        </p:spPr>
+      </p:pic>
+      <p:sp>
+        <p:nvSpPr>
+          <p:cNvPr id="16" name="Text 11"/>
+          <p:cNvSpPr/>
+          <p:nvPr/>
+        </p:nvSpPr>
+        <p:spPr>
+          <a:xfrm>
+            <a:off x="5184648" y="1572768"/>
+            <a:ext cx="1444752" cy="256032"/>
+          </a:xfrm>
+          <a:prstGeom prst="rect">
+            <a:avLst/>
+          </a:prstGeom>
+          <a:noFill/>
+          <a:ln/>
+        </p:spPr>
+        <p:txBody>
+          <a:bodyPr wrap="square" lIns="0" tIns="0" rIns="0" bIns="0" rtlCol="0" anchor="ctr"/>
+          <a:lstStyle/>
+          <a:p>
+            <a:pPr marL="0" indent="0">
+              <a:buNone/>
+            </a:pPr>
+            <a:r>
+              <a:rPr lang="en-US" sz="1300" b="1" dirty="0">
+                <a:solidFill>
+                  <a:srgbClr val="E2C97E"/>
+                </a:solidFill>
+                <a:latin typeface="Cambria" pitchFamily="34" charset="0"/>
+                <a:ea typeface="Cambria" pitchFamily="34" charset="-122"/>
+                <a:cs typeface="Cambria" pitchFamily="34" charset="-120"/>
+              </a:rPr>
+              <a:t>Server — Skala Menengah</a:t>
+            </a:r>
+          </a:p>
+        </p:txBody>
+      </p:sp>
+      <p:sp>
+        <p:nvSpPr>
+          <p:cNvPr id="17" name="Text 12"/>
+          <p:cNvSpPr/>
+          <p:nvPr/>
+        </p:nvSpPr>
+        <p:spPr>
+          <a:xfrm>
+            <a:off x="4892040" y="1883664"/>
+            <a:ext cx="1737360" cy="676656"/>
+          </a:xfrm>
+          <a:prstGeom prst="rect">
+            <a:avLst/>
+          </a:prstGeom>
+          <a:noFill/>
+          <a:ln/>
+        </p:spPr>
+        <p:txBody>
+          <a:bodyPr wrap="square" lIns="0" tIns="0" rIns="0" bIns="0" rtlCol="0" anchor="ctr"/>
+          <a:lstStyle/>
+          <a:p>
+            <a:pPr marL="0" indent="0">
+              <a:lnSpc>
+                <a:spcPct val="135000"/>
+              </a:lnSpc>
+              <a:buNone/>
+            </a:pPr>
+            <a:r>
+              <a:rPr lang="en-US" sz="1000" dirty="0">
+                <a:solidFill>
+                  <a:srgbClr val="AAAAAA"/>
+                </a:solidFill>
+                <a:latin typeface="Calibri" pitchFamily="34" charset="0"/>
+                <a:ea typeface="Calibri" pitchFamily="34" charset="-122"/>
+                <a:cs typeface="Calibri" pitchFamily="34" charset="-120"/>
+              </a:rPr>
+              <a:t>8 GB RAM · 4 vCPU · 120 GB SSD + storage terpisah · 5 TB/bulan. Multi-cabang 50-200 petugas, 5.000+ nasabah.</a:t>
+            </a:r>
+          </a:p>
+        </p:txBody>
+      </p:sp>
+      <p:sp>
+        <p:nvSpPr>
+          <p:cNvPr id="18" name="Shape 13"/>
+          <p:cNvSpPr/>
+          <p:nvPr/>
+        </p:nvSpPr>
+        <p:spPr>
+          <a:xfrm>
+            <a:off x="6885432" y="1481328"/>
+            <a:ext cx="2011680" cy="1170432"/>
+          </a:xfrm>
+          <a:prstGeom prst="roundRect">
+            <a:avLst>
+              <a:gd name="adj" fmla="val 6250"/>
+            </a:avLst>
+          </a:prstGeom>
+          <a:solidFill>
+            <a:srgbClr val="FFFFFF">
+              <a:alpha val="8000"/>
+            </a:srgbClr>
+          </a:solidFill>
+          <a:ln w="12700">
+            <a:solidFill>
+              <a:srgbClr val="FFFFFF">
+                <a:alpha val="15000"/>
+              </a:srgbClr>
+            </a:solidFill>
+            <a:prstDash val="solid"/>
+          </a:ln>
+        </p:spPr>
+        <p:txBody>
+          <a:bodyPr/>
+          <a:p/>
+        </p:txBody>
+      </p:sp>
+      <p:pic>
+        <p:nvPicPr>
+          <p:cNvPr id="19" name="Image 3" descr="preencoded.png"/>
+          <p:cNvPicPr>
+            <a:picLocks noChangeAspect="1"/>
+          </p:cNvPicPr>
+          <p:nvPr/>
+        </p:nvPicPr>
+        <p:blipFill>
+          <a:blip r:embed="rId5"/>
+          <a:stretch>
+            <a:fillRect/>
+          </a:stretch>
+        </p:blipFill>
+        <p:spPr>
+          <a:xfrm>
+            <a:off x="7050024" y="1591056"/>
+            <a:ext cx="219456" cy="219456"/>
+          </a:xfrm>
+          <a:prstGeom prst="rect">
+            <a:avLst/>
+          </a:prstGeom>
+        </p:spPr>
+      </p:pic>
+      <p:sp>
+        <p:nvSpPr>
+          <p:cNvPr id="20" name="Text 14"/>
+          <p:cNvSpPr/>
+          <p:nvPr/>
+        </p:nvSpPr>
+        <p:spPr>
+          <a:xfrm>
+            <a:off x="7342632" y="1572768"/>
+            <a:ext cx="1444752" cy="256032"/>
+          </a:xfrm>
+          <a:prstGeom prst="rect">
+            <a:avLst/>
+          </a:prstGeom>
+          <a:noFill/>
+          <a:ln/>
+        </p:spPr>
+        <p:txBody>
+          <a:bodyPr wrap="square" lIns="0" tIns="0" rIns="0" bIns="0" rtlCol="0" anchor="ctr"/>
+          <a:lstStyle/>
+          <a:p>
+            <a:pPr marL="0" indent="0">
+              <a:buNone/>
+            </a:pPr>
+            <a:r>
+              <a:rPr lang="en-US" sz="1300" b="1" dirty="0">
+                <a:solidFill>
+                  <a:srgbClr val="E2C97E"/>
+                </a:solidFill>
+                <a:latin typeface="Cambria" pitchFamily="34" charset="0"/>
+                <a:ea typeface="Cambria" pitchFamily="34" charset="-122"/>
+                <a:cs typeface="Cambria" pitchFamily="34" charset="-120"/>
+              </a:rPr>
+              <a:t>Server — Enterprise</a:t>
+            </a:r>
+          </a:p>
+        </p:txBody>
+      </p:sp>
+      <p:sp>
+        <p:nvSpPr>
+          <p:cNvPr id="21" name="Text 15"/>
+          <p:cNvSpPr/>
+          <p:nvPr/>
+        </p:nvSpPr>
+        <p:spPr>
+          <a:xfrm>
+            <a:off x="7050024" y="1883664"/>
+            <a:ext cx="1737360" cy="676656"/>
+          </a:xfrm>
+          <a:prstGeom prst="rect">
+            <a:avLst/>
+          </a:prstGeom>
+          <a:noFill/>
+          <a:ln/>
+        </p:spPr>
+        <p:txBody>
+          <a:bodyPr wrap="square" lIns="0" tIns="0" rIns="0" bIns="0" rtlCol="0" anchor="ctr"/>
+          <a:lstStyle/>
+          <a:p>
+            <a:pPr marL="0" indent="0">
+              <a:lnSpc>
+                <a:spcPct val="135000"/>
+              </a:lnSpc>
+              <a:buNone/>
+            </a:pPr>
+            <a:r>
+              <a:rPr lang="en-US" sz="1000" dirty="0">
+                <a:solidFill>
+                  <a:srgbClr val="AAAAAA"/>
+                </a:solidFill>
+                <a:latin typeface="Calibri" pitchFamily="34" charset="0"/>
+                <a:ea typeface="Calibri" pitchFamily="34" charset="-122"/>
+                <a:cs typeface="Calibri" pitchFamily="34" charset="-120"/>
+              </a:rPr>
+              <a:t>16+ GB RAM · 8+ vCPU · DB terpisah + S3 storage · Private link. 200+ petugas, HA replica, disaster recovery.</a:t>
+            </a:r>
+          </a:p>
+        </p:txBody>
+      </p:sp>
+      <p:sp>
+        <p:nvSpPr>
+          <p:cNvPr id="22" name="Shape 16"/>
+          <p:cNvSpPr/>
+          <p:nvPr/>
+        </p:nvSpPr>
+        <p:spPr>
+          <a:xfrm>
+            <a:off x="411480" y="2761488"/>
+            <a:ext cx="2011680" cy="1170432"/>
+          </a:xfrm>
+          <a:prstGeom prst="roundRect">
+            <a:avLst>
+              <a:gd name="adj" fmla="val 6250"/>
+            </a:avLst>
+          </a:prstGeom>
+          <a:solidFill>
+            <a:srgbClr val="FFFFFF">
+              <a:alpha val="8000"/>
+            </a:srgbClr>
+          </a:solidFill>
+          <a:ln w="12700">
+            <a:solidFill>
+              <a:srgbClr val="FFFFFF">
+                <a:alpha val="15000"/>
+              </a:srgbClr>
+            </a:solidFill>
+            <a:prstDash val="solid"/>
+          </a:ln>
+        </p:spPr>
+        <p:txBody>
+          <a:bodyPr/>
+          <a:p/>
+        </p:txBody>
+      </p:sp>
+      <p:pic>
+        <p:nvPicPr>
+          <p:cNvPr id="23" name="Image 4" descr="preencoded.png"/>
+          <p:cNvPicPr>
+            <a:picLocks noChangeAspect="1"/>
+          </p:cNvPicPr>
+          <p:nvPr/>
+        </p:nvPicPr>
+        <p:blipFill>
+          <a:blip r:embed="rId6"/>
+          <a:stretch>
+            <a:fillRect/>
+          </a:stretch>
+        </p:blipFill>
+        <p:spPr>
+          <a:xfrm>
+            <a:off x="576072" y="2871216"/>
+            <a:ext cx="219456" cy="219456"/>
+          </a:xfrm>
+          <a:prstGeom prst="rect">
+            <a:avLst/>
+          </a:prstGeom>
+        </p:spPr>
+      </p:pic>
+      <p:sp>
+        <p:nvSpPr>
+          <p:cNvPr id="24" name="Text 17"/>
+          <p:cNvSpPr/>
+          <p:nvPr/>
+        </p:nvSpPr>
+        <p:spPr>
+          <a:xfrm>
+            <a:off x="868680" y="2852928"/>
+            <a:ext cx="1444752" cy="256032"/>
+          </a:xfrm>
+          <a:prstGeom prst="rect">
+            <a:avLst/>
+          </a:prstGeom>
+          <a:noFill/>
+          <a:ln/>
+        </p:spPr>
+        <p:txBody>
+          <a:bodyPr wrap="square" lIns="0" tIns="0" rIns="0" bIns="0" rtlCol="0" anchor="ctr"/>
+          <a:lstStyle/>
+          <a:p>
+            <a:pPr marL="0" indent="0">
+              <a:buNone/>
+            </a:pPr>
+            <a:r>
+              <a:rPr lang="en-US" sz="1300" b="1" dirty="0">
+                <a:solidFill>
+                  <a:srgbClr val="E2C97E"/>
+                </a:solidFill>
+                <a:latin typeface="Cambria" pitchFamily="34" charset="0"/>
+                <a:ea typeface="Cambria" pitchFamily="34" charset="-122"/>
+                <a:cs typeface="Cambria" pitchFamily="34" charset="-120"/>
+              </a:rPr>
+              <a:t>Laptop Supervisor</a:t>
+            </a:r>
+          </a:p>
+        </p:txBody>
+      </p:sp>
+      <p:sp>
+        <p:nvSpPr>
+          <p:cNvPr id="25" name="Text 18"/>
+          <p:cNvSpPr/>
+          <p:nvPr/>
+        </p:nvSpPr>
+        <p:spPr>
+          <a:xfrm>
+            <a:off x="576072" y="3163824"/>
+            <a:ext cx="1737360" cy="676656"/>
+          </a:xfrm>
+          <a:prstGeom prst="rect">
+            <a:avLst/>
+          </a:prstGeom>
+          <a:noFill/>
+          <a:ln/>
+        </p:spPr>
+        <p:txBody>
+          <a:bodyPr wrap="square" lIns="0" tIns="0" rIns="0" bIns="0" rtlCol="0" anchor="ctr"/>
+          <a:lstStyle/>
+          <a:p>
+            <a:pPr marL="0" indent="0">
+              <a:lnSpc>
+                <a:spcPct val="135000"/>
+              </a:lnSpc>
+              <a:buNone/>
+            </a:pPr>
+            <a:r>
+              <a:rPr lang="en-US" sz="1000" dirty="0">
+                <a:solidFill>
+                  <a:srgbClr val="AAAAAA"/>
+                </a:solidFill>
+                <a:latin typeface="Calibri" pitchFamily="34" charset="0"/>
+                <a:ea typeface="Calibri" pitchFamily="34" charset="-122"/>
+                <a:cs typeface="Calibri" pitchFamily="34" charset="-120"/>
+              </a:rPr>
+              <a:t>RAM 4 GB min (rec 8 GB) · Chrome/Edge/Firefox terbaru · Layar 14" Full HD · Internet stabil untuk SSE realtime.</a:t>
+            </a:r>
+          </a:p>
+        </p:txBody>
+      </p:sp>
+      <p:sp>
+        <p:nvSpPr>
+          <p:cNvPr id="26" name="Shape 19"/>
+          <p:cNvSpPr/>
+          <p:nvPr/>
+        </p:nvSpPr>
+        <p:spPr>
+          <a:xfrm>
+            <a:off x="2569464" y="2761488"/>
+            <a:ext cx="2011680" cy="1170432"/>
+          </a:xfrm>
+          <a:prstGeom prst="roundRect">
+            <a:avLst>
+              <a:gd name="adj" fmla="val 6250"/>
+            </a:avLst>
+          </a:prstGeom>
+          <a:solidFill>
+            <a:srgbClr val="FFFFFF">
+              <a:alpha val="8000"/>
+            </a:srgbClr>
+          </a:solidFill>
+          <a:ln w="12700">
+            <a:solidFill>
+              <a:srgbClr val="FFFFFF">
+                <a:alpha val="15000"/>
+              </a:srgbClr>
+            </a:solidFill>
+            <a:prstDash val="solid"/>
+          </a:ln>
+        </p:spPr>
+        <p:txBody>
+          <a:bodyPr/>
+          <a:p/>
+        </p:txBody>
+      </p:sp>
+      <p:pic>
+        <p:nvPicPr>
+          <p:cNvPr id="27" name="Image 5" descr="preencoded.png"/>
+          <p:cNvPicPr>
+            <a:picLocks noChangeAspect="1"/>
+          </p:cNvPicPr>
+          <p:nvPr/>
+        </p:nvPicPr>
+        <p:blipFill>
+          <a:blip r:embed="rId7"/>
+          <a:stretch>
+            <a:fillRect/>
+          </a:stretch>
+        </p:blipFill>
+        <p:spPr>
+          <a:xfrm>
+            <a:off x="2734056" y="2871216"/>
+            <a:ext cx="219456" cy="219456"/>
+          </a:xfrm>
+          <a:prstGeom prst="rect">
+            <a:avLst/>
+          </a:prstGeom>
+        </p:spPr>
+      </p:pic>
+      <p:sp>
+        <p:nvSpPr>
+          <p:cNvPr id="28" name="Text 20"/>
+          <p:cNvSpPr/>
+          <p:nvPr/>
+        </p:nvSpPr>
+        <p:spPr>
+          <a:xfrm>
+            <a:off x="3026664" y="2852928"/>
+            <a:ext cx="1444752" cy="256032"/>
+          </a:xfrm>
+          <a:prstGeom prst="rect">
+            <a:avLst/>
+          </a:prstGeom>
+          <a:noFill/>
+          <a:ln/>
+        </p:spPr>
+        <p:txBody>
+          <a:bodyPr wrap="square" lIns="0" tIns="0" rIns="0" bIns="0" rtlCol="0" anchor="ctr"/>
+          <a:lstStyle/>
+          <a:p>
+            <a:pPr marL="0" indent="0">
+              <a:buNone/>
+            </a:pPr>
+            <a:r>
+              <a:rPr lang="en-US" sz="1300" b="1" dirty="0">
+                <a:solidFill>
+                  <a:srgbClr val="E2C97E"/>
+                </a:solidFill>
+                <a:latin typeface="Cambria" pitchFamily="34" charset="0"/>
+                <a:ea typeface="Cambria" pitchFamily="34" charset="-122"/>
+                <a:cs typeface="Cambria" pitchFamily="34" charset="-120"/>
+              </a:rPr>
+              <a:t>HP Petugas — PWA</a:t>
+            </a:r>
+          </a:p>
+        </p:txBody>
+      </p:sp>
+      <p:sp>
+        <p:nvSpPr>
+          <p:cNvPr id="29" name="Text 21"/>
+          <p:cNvSpPr/>
+          <p:nvPr/>
+        </p:nvSpPr>
+        <p:spPr>
+          <a:xfrm>
+            <a:off x="2734056" y="3163824"/>
+            <a:ext cx="1737360" cy="676656"/>
+          </a:xfrm>
+          <a:prstGeom prst="rect">
+            <a:avLst/>
+          </a:prstGeom>
+          <a:noFill/>
+          <a:ln/>
+        </p:spPr>
+        <p:txBody>
+          <a:bodyPr wrap="square" lIns="0" tIns="0" rIns="0" bIns="0" rtlCol="0" anchor="ctr"/>
+          <a:lstStyle/>
+          <a:p>
+            <a:pPr marL="0" indent="0">
+              <a:lnSpc>
+                <a:spcPct val="135000"/>
+              </a:lnSpc>
+              <a:buNone/>
+            </a:pPr>
+            <a:r>
+              <a:rPr lang="en-US" sz="1000" dirty="0">
+                <a:solidFill>
+                  <a:srgbClr val="AAAAAA"/>
+                </a:solidFill>
+                <a:latin typeface="Calibri" pitchFamily="34" charset="0"/>
+                <a:ea typeface="Calibri" pitchFamily="34" charset="-122"/>
+                <a:cs typeface="Calibri" pitchFamily="34" charset="-120"/>
+              </a:rPr>
+              <a:t>RAM 2 GB · Android 8+ / iOS 14+ · Chrome 90+ / Safari 14+ · GPS aktif. Cakupan tracking ~70-85% (browser suspend saat layar mati).</a:t>
+            </a:r>
+          </a:p>
+        </p:txBody>
+      </p:sp>
+      <p:sp>
+        <p:nvSpPr>
+          <p:cNvPr id="30" name="Shape 22"/>
+          <p:cNvSpPr/>
+          <p:nvPr/>
+        </p:nvSpPr>
+        <p:spPr>
+          <a:xfrm>
+            <a:off x="4727448" y="2761488"/>
+            <a:ext cx="2011680" cy="1170432"/>
+          </a:xfrm>
+          <a:prstGeom prst="roundRect">
+            <a:avLst>
+              <a:gd name="adj" fmla="val 6250"/>
+            </a:avLst>
+          </a:prstGeom>
+          <a:solidFill>
+            <a:srgbClr val="FFFFFF">
+              <a:alpha val="8000"/>
+            </a:srgbClr>
+          </a:solidFill>
+          <a:ln w="12700">
+            <a:solidFill>
+              <a:srgbClr val="FFFFFF">
+                <a:alpha val="15000"/>
+              </a:srgbClr>
+            </a:solidFill>
+            <a:prstDash val="solid"/>
+          </a:ln>
+        </p:spPr>
+        <p:txBody>
+          <a:bodyPr/>
+          <a:p/>
+        </p:txBody>
+      </p:sp>
+      <p:pic>
+        <p:nvPicPr>
+          <p:cNvPr id="31" name="Image 6" descr="preencoded.png"/>
+          <p:cNvPicPr>
+            <a:picLocks noChangeAspect="1"/>
+          </p:cNvPicPr>
+          <p:nvPr/>
+        </p:nvPicPr>
+        <p:blipFill>
+          <a:blip r:embed="rId8"/>
+          <a:stretch>
+            <a:fillRect/>
+          </a:stretch>
+        </p:blipFill>
+        <p:spPr>
+          <a:xfrm>
+            <a:off x="4892040" y="2871216"/>
+            <a:ext cx="219456" cy="219456"/>
+          </a:xfrm>
+          <a:prstGeom prst="rect">
+            <a:avLst/>
+          </a:prstGeom>
+        </p:spPr>
+      </p:pic>
+      <p:sp>
+        <p:nvSpPr>
+          <p:cNvPr id="32" name="Text 23"/>
+          <p:cNvSpPr/>
+          <p:nvPr/>
+        </p:nvSpPr>
+        <p:spPr>
+          <a:xfrm>
+            <a:off x="5184648" y="2852928"/>
+            <a:ext cx="1444752" cy="256032"/>
+          </a:xfrm>
+          <a:prstGeom prst="rect">
+            <a:avLst/>
+          </a:prstGeom>
+          <a:noFill/>
+          <a:ln/>
+        </p:spPr>
+        <p:txBody>
+          <a:bodyPr wrap="square" lIns="0" tIns="0" rIns="0" bIns="0" rtlCol="0" anchor="ctr"/>
+          <a:lstStyle/>
+          <a:p>
+            <a:pPr marL="0" indent="0">
+              <a:buNone/>
+            </a:pPr>
+            <a:r>
+              <a:rPr lang="en-US" sz="1300" b="1" dirty="0">
+                <a:solidFill>
+                  <a:srgbClr val="E2C97E"/>
+                </a:solidFill>
+                <a:latin typeface="Cambria" pitchFamily="34" charset="0"/>
+                <a:ea typeface="Cambria" pitchFamily="34" charset="-122"/>
+                <a:cs typeface="Cambria" pitchFamily="34" charset="-120"/>
+              </a:rPr>
+              <a:t>HP Petugas — APK Native</a:t>
+            </a:r>
+          </a:p>
+        </p:txBody>
+      </p:sp>
+      <p:sp>
+        <p:nvSpPr>
+          <p:cNvPr id="33" name="Text 24"/>
+          <p:cNvSpPr/>
+          <p:nvPr/>
+        </p:nvSpPr>
+        <p:spPr>
+          <a:xfrm>
+            <a:off x="4892040" y="3163824"/>
+            <a:ext cx="1737360" cy="676656"/>
+          </a:xfrm>
+          <a:prstGeom prst="rect">
+            <a:avLst/>
+          </a:prstGeom>
+          <a:noFill/>
+          <a:ln/>
+        </p:spPr>
+        <p:txBody>
+          <a:bodyPr wrap="square" lIns="0" tIns="0" rIns="0" bIns="0" rtlCol="0" anchor="ctr"/>
+          <a:lstStyle/>
+          <a:p>
+            <a:pPr marL="0" indent="0">
+              <a:lnSpc>
+                <a:spcPct val="135000"/>
+              </a:lnSpc>
+              <a:buNone/>
+            </a:pPr>
+            <a:r>
+              <a:rPr lang="en-US" sz="1000" dirty="0">
+                <a:solidFill>
+                  <a:srgbClr val="AAAAAA"/>
+                </a:solidFill>
+                <a:latin typeface="Calibri" pitchFamily="34" charset="0"/>
+                <a:ea typeface="Calibri" pitchFamily="34" charset="-122"/>
+                <a:cs typeface="Calibri" pitchFamily="34" charset="-120"/>
+              </a:rPr>
+              <a:t>RAM 3+ GB · Android 8+ · Google Play Services WAJIB (FCM) · foreground service GPS. Cakupan tracking ~95-99% walau app tertutup.</a:t>
+            </a:r>
+          </a:p>
+        </p:txBody>
+      </p:sp>
+      <p:sp>
+        <p:nvSpPr>
+          <p:cNvPr id="34" name="Shape 25"/>
+          <p:cNvSpPr/>
+          <p:nvPr/>
+        </p:nvSpPr>
+        <p:spPr>
+          <a:xfrm>
+            <a:off x="6885432" y="2761488"/>
+            <a:ext cx="2011680" cy="1170432"/>
+          </a:xfrm>
+          <a:prstGeom prst="roundRect">
+            <a:avLst>
+              <a:gd name="adj" fmla="val 6250"/>
+            </a:avLst>
+          </a:prstGeom>
+          <a:solidFill>
+            <a:srgbClr val="FFFFFF">
+              <a:alpha val="8000"/>
+            </a:srgbClr>
+          </a:solidFill>
+          <a:ln w="12700">
+            <a:solidFill>
+              <a:srgbClr val="FFFFFF">
+                <a:alpha val="15000"/>
+              </a:srgbClr>
+            </a:solidFill>
+            <a:prstDash val="solid"/>
+          </a:ln>
+        </p:spPr>
+        <p:txBody>
+          <a:bodyPr/>
+          <a:p/>
+        </p:txBody>
+      </p:sp>
+      <p:pic>
+        <p:nvPicPr>
+          <p:cNvPr id="35" name="Image 7" descr="preencoded.png"/>
+          <p:cNvPicPr>
+            <a:picLocks noChangeAspect="1"/>
+          </p:cNvPicPr>
+          <p:nvPr/>
+        </p:nvPicPr>
+        <p:blipFill>
+          <a:blip r:embed="rId9"/>
+          <a:stretch>
+            <a:fillRect/>
+          </a:stretch>
+        </p:blipFill>
+        <p:spPr>
+          <a:xfrm>
+            <a:off x="7050024" y="2871216"/>
+            <a:ext cx="219456" cy="219456"/>
+          </a:xfrm>
+          <a:prstGeom prst="rect">
+            <a:avLst/>
+          </a:prstGeom>
+        </p:spPr>
+      </p:pic>
+      <p:sp>
+        <p:nvSpPr>
+          <p:cNvPr id="36" name="Text 26"/>
+          <p:cNvSpPr/>
+          <p:nvPr/>
+        </p:nvSpPr>
+        <p:spPr>
+          <a:xfrm>
+            <a:off x="7342632" y="2852928"/>
+            <a:ext cx="1444752" cy="256032"/>
+          </a:xfrm>
+          <a:prstGeom prst="rect">
+            <a:avLst/>
+          </a:prstGeom>
+          <a:noFill/>
+          <a:ln/>
+        </p:spPr>
+        <p:txBody>
+          <a:bodyPr wrap="square" lIns="0" tIns="0" rIns="0" bIns="0" rtlCol="0" anchor="ctr"/>
+          <a:lstStyle/>
+          <a:p>
+            <a:pPr marL="0" indent="0">
+              <a:buNone/>
+            </a:pPr>
+            <a:r>
+              <a:rPr lang="en-US" sz="1300" b="1" dirty="0">
+                <a:solidFill>
+                  <a:srgbClr val="E2C97E"/>
+                </a:solidFill>
+                <a:latin typeface="Cambria" pitchFamily="34" charset="0"/>
+                <a:ea typeface="Cambria" pitchFamily="34" charset="-122"/>
+                <a:cs typeface="Cambria" pitchFamily="34" charset="-120"/>
+              </a:rPr>
+              <a:t>Deployment &amp; Ops</a:t>
+            </a:r>
+          </a:p>
+        </p:txBody>
+      </p:sp>
+      <p:sp>
+        <p:nvSpPr>
+          <p:cNvPr id="37" name="Text 27"/>
+          <p:cNvSpPr/>
+          <p:nvPr/>
+        </p:nvSpPr>
+        <p:spPr>
+          <a:xfrm>
+            <a:off x="7050024" y="3163824"/>
+            <a:ext cx="1737360" cy="676656"/>
+          </a:xfrm>
+          <a:prstGeom prst="rect">
+            <a:avLst/>
+          </a:prstGeom>
+          <a:noFill/>
+          <a:ln/>
+        </p:spPr>
+        <p:txBody>
+          <a:bodyPr wrap="square" lIns="0" tIns="0" rIns="0" bIns="0" rtlCol="0" anchor="ctr"/>
+          <a:lstStyle/>
+          <a:p>
+            <a:pPr marL="0" indent="0">
+              <a:lnSpc>
+                <a:spcPct val="135000"/>
+              </a:lnSpc>
+              <a:buNone/>
+            </a:pPr>
+            <a:r>
+              <a:rPr lang="en-US" sz="1000" dirty="0">
+                <a:solidFill>
+                  <a:srgbClr val="AAAAAA"/>
+                </a:solidFill>
+                <a:latin typeface="Calibri" pitchFamily="34" charset="0"/>
+                <a:ea typeface="Calibri" pitchFamily="34" charset="-122"/>
+                <a:cs typeface="Calibri" pitchFamily="34" charset="-120"/>
+              </a:rPr>
+              <a:t>Docker Compose · Caddy TLS 1.3 + HTTP/3 · PostgreSQL 16 · Backup harian retensi 30 hari · TLS 1.3 Let's Encrypt auto-renew.</a:t>
+            </a:r>
+          </a:p>
+        </p:txBody>
+      </p:sp>
+      <p:sp>
+        <p:nvSpPr>
+          <p:cNvPr id="38" name="Shape 28"/>
+          <p:cNvSpPr/>
+          <p:nvPr/>
+        </p:nvSpPr>
+        <p:spPr>
+          <a:xfrm>
+            <a:off x="411480" y="4078224"/>
+            <a:ext cx="2011680" cy="749808"/>
+          </a:xfrm>
+          <a:prstGeom prst="roundRect">
+            <a:avLst>
+              <a:gd name="adj" fmla="val 9756"/>
+            </a:avLst>
+          </a:prstGeom>
+          <a:solidFill>
+            <a:srgbClr val="FFFFFF">
+              <a:alpha val="10000"/>
+            </a:srgbClr>
+          </a:solidFill>
+          <a:ln w="12700">
+            <a:solidFill>
+              <a:srgbClr val="FFFFFF">
+                <a:alpha val="15000"/>
+              </a:srgbClr>
+            </a:solidFill>
+            <a:prstDash val="solid"/>
+          </a:ln>
+        </p:spPr>
+        <p:txBody>
+          <a:bodyPr/>
+          <a:p/>
+        </p:txBody>
+      </p:sp>
+      <p:sp>
+        <p:nvSpPr>
+          <p:cNvPr id="39" name="Text 29"/>
+          <p:cNvSpPr/>
+          <p:nvPr/>
+        </p:nvSpPr>
+        <p:spPr>
+          <a:xfrm>
+            <a:off x="411480" y="4114800"/>
+            <a:ext cx="2011680" cy="347472"/>
+          </a:xfrm>
+          <a:prstGeom prst="rect">
+            <a:avLst/>
+          </a:prstGeom>
+          <a:noFill/>
+          <a:ln/>
+        </p:spPr>
+        <p:txBody>
+          <a:bodyPr wrap="square" lIns="0" tIns="0" rIns="0" bIns="0" rtlCol="0" anchor="ctr"/>
+          <a:lstStyle/>
+          <a:p>
+            <a:pPr marL="0" indent="0" algn="ctr">
+              <a:buNone/>
+            </a:pPr>
+            <a:r>
+              <a:rPr lang="en-US" sz="2200" b="1" dirty="0">
+                <a:solidFill>
+                  <a:srgbClr val="E2C97E"/>
+                </a:solidFill>
+                <a:latin typeface="Cambria" pitchFamily="34" charset="0"/>
+                <a:ea typeface="Cambria" pitchFamily="34" charset="-122"/>
+                <a:cs typeface="Cambria" pitchFamily="34" charset="-120"/>
+              </a:rPr>
+              <a:t>Rp 25 jt</a:t>
+            </a:r>
+          </a:p>
+        </p:txBody>
+      </p:sp>
+      <p:sp>
+        <p:nvSpPr>
+          <p:cNvPr id="40" name="Text 30"/>
+          <p:cNvSpPr/>
+          <p:nvPr/>
+        </p:nvSpPr>
+        <p:spPr>
+          <a:xfrm>
+            <a:off x="411480" y="4462272"/>
+            <a:ext cx="2011680" cy="274320"/>
+          </a:xfrm>
+          <a:prstGeom prst="rect">
+            <a:avLst/>
+          </a:prstGeom>
+          <a:noFill/>
+          <a:ln/>
+        </p:spPr>
+        <p:txBody>
+          <a:bodyPr wrap="square" lIns="0" tIns="0" rIns="0" bIns="0" rtlCol="0" anchor="ctr"/>
+          <a:lstStyle/>
+          <a:p>
+            <a:pPr marL="0" indent="0" algn="ctr">
+              <a:buNone/>
+            </a:pPr>
+            <a:r>
+              <a:rPr lang="en-US" sz="1000" dirty="0">
+                <a:solidFill>
+                  <a:srgbClr val="999999"/>
+                </a:solidFill>
+                <a:latin typeface="Calibri" pitchFamily="34" charset="0"/>
+                <a:ea typeface="Calibri" pitchFamily="34" charset="-122"/>
+                <a:cs typeface="Calibri" pitchFamily="34" charset="-120"/>
+              </a:rPr>
+              <a:t>CapEx 1 Cabang (6 petugas)</a:t>
+            </a:r>
+          </a:p>
+        </p:txBody>
+      </p:sp>
+      <p:sp>
+        <p:nvSpPr>
+          <p:cNvPr id="41" name="Shape 31"/>
+          <p:cNvSpPr/>
+          <p:nvPr/>
+        </p:nvSpPr>
+        <p:spPr>
+          <a:xfrm>
+            <a:off x="2569464" y="4078224"/>
+            <a:ext cx="2011680" cy="749808"/>
+          </a:xfrm>
+          <a:prstGeom prst="roundRect">
+            <a:avLst>
+              <a:gd name="adj" fmla="val 9756"/>
+            </a:avLst>
+          </a:prstGeom>
+          <a:solidFill>
+            <a:srgbClr val="FFFFFF">
+              <a:alpha val="10000"/>
+            </a:srgbClr>
+          </a:solidFill>
+          <a:ln w="12700">
+            <a:solidFill>
+              <a:srgbClr val="FFFFFF">
+                <a:alpha val="15000"/>
+              </a:srgbClr>
+            </a:solidFill>
+            <a:prstDash val="solid"/>
+          </a:ln>
+        </p:spPr>
+        <p:txBody>
+          <a:bodyPr/>
+          <a:p/>
+        </p:txBody>
+      </p:sp>
+      <p:sp>
+        <p:nvSpPr>
+          <p:cNvPr id="42" name="Text 32"/>
+          <p:cNvSpPr/>
+          <p:nvPr/>
+        </p:nvSpPr>
+        <p:spPr>
+          <a:xfrm>
+            <a:off x="2569464" y="4114800"/>
+            <a:ext cx="2011680" cy="347472"/>
+          </a:xfrm>
+          <a:prstGeom prst="rect">
+            <a:avLst/>
+          </a:prstGeom>
+          <a:noFill/>
+          <a:ln/>
+        </p:spPr>
+        <p:txBody>
+          <a:bodyPr wrap="square" lIns="0" tIns="0" rIns="0" bIns="0" rtlCol="0" anchor="ctr"/>
+          <a:lstStyle/>
+          <a:p>
+            <a:pPr marL="0" indent="0" algn="ctr">
+              <a:buNone/>
+            </a:pPr>
+            <a:r>
+              <a:rPr lang="en-US" sz="2200" b="1" dirty="0">
+                <a:solidFill>
+                  <a:srgbClr val="E2C97E"/>
+                </a:solidFill>
+                <a:latin typeface="Cambria" pitchFamily="34" charset="0"/>
+                <a:ea typeface="Cambria" pitchFamily="34" charset="-122"/>
+                <a:cs typeface="Cambria" pitchFamily="34" charset="-120"/>
+              </a:rPr>
+              <a:t>Rp 3,6 jt</a:t>
+            </a:r>
+          </a:p>
+        </p:txBody>
+      </p:sp>
+      <p:sp>
+        <p:nvSpPr>
+          <p:cNvPr id="43" name="Text 33"/>
+          <p:cNvSpPr/>
+          <p:nvPr/>
+        </p:nvSpPr>
+        <p:spPr>
+          <a:xfrm>
+            <a:off x="2569464" y="4462272"/>
+            <a:ext cx="2011680" cy="274320"/>
+          </a:xfrm>
+          <a:prstGeom prst="rect">
+            <a:avLst/>
+          </a:prstGeom>
+          <a:noFill/>
+          <a:ln/>
+        </p:spPr>
+        <p:txBody>
+          <a:bodyPr wrap="square" lIns="0" tIns="0" rIns="0" bIns="0" rtlCol="0" anchor="ctr"/>
+          <a:lstStyle/>
+          <a:p>
+            <a:pPr marL="0" indent="0" algn="ctr">
+              <a:buNone/>
+            </a:pPr>
+            <a:r>
+              <a:rPr lang="en-US" sz="1000" dirty="0">
+                <a:solidFill>
+                  <a:srgbClr val="999999"/>
+                </a:solidFill>
+                <a:latin typeface="Calibri" pitchFamily="34" charset="0"/>
+                <a:ea typeface="Calibri" pitchFamily="34" charset="-122"/>
+                <a:cs typeface="Calibri" pitchFamily="34" charset="-120"/>
+              </a:rPr>
+              <a:t>OpEx Server / Tahun</a:t>
+            </a:r>
+          </a:p>
+        </p:txBody>
+      </p:sp>
+      <p:sp>
+        <p:nvSpPr>
+          <p:cNvPr id="44" name="Shape 34"/>
+          <p:cNvSpPr/>
+          <p:nvPr/>
+        </p:nvSpPr>
+        <p:spPr>
+          <a:xfrm>
+            <a:off x="4727448" y="4078224"/>
+            <a:ext cx="2011680" cy="749808"/>
+          </a:xfrm>
+          <a:prstGeom prst="roundRect">
+            <a:avLst>
+              <a:gd name="adj" fmla="val 9756"/>
+            </a:avLst>
+          </a:prstGeom>
+          <a:solidFill>
+            <a:srgbClr val="FFFFFF">
+              <a:alpha val="10000"/>
+            </a:srgbClr>
+          </a:solidFill>
+          <a:ln w="12700">
+            <a:solidFill>
+              <a:srgbClr val="FFFFFF">
+                <a:alpha val="15000"/>
+              </a:srgbClr>
+            </a:solidFill>
+            <a:prstDash val="solid"/>
+          </a:ln>
+        </p:spPr>
+        <p:txBody>
+          <a:bodyPr/>
+          <a:p/>
+        </p:txBody>
+      </p:sp>
+      <p:sp>
+        <p:nvSpPr>
+          <p:cNvPr id="45" name="Text 35"/>
+          <p:cNvSpPr/>
+          <p:nvPr/>
+        </p:nvSpPr>
+        <p:spPr>
+          <a:xfrm>
+            <a:off x="4727448" y="4114800"/>
+            <a:ext cx="2011680" cy="347472"/>
+          </a:xfrm>
+          <a:prstGeom prst="rect">
+            <a:avLst/>
+          </a:prstGeom>
+          <a:noFill/>
+          <a:ln/>
+        </p:spPr>
+        <p:txBody>
+          <a:bodyPr wrap="square" lIns="0" tIns="0" rIns="0" bIns="0" rtlCol="0" anchor="ctr"/>
+          <a:lstStyle/>
+          <a:p>
+            <a:pPr marL="0" indent="0" algn="ctr">
+              <a:buNone/>
+            </a:pPr>
+            <a:r>
+              <a:rPr lang="en-US" sz="2200" b="1" dirty="0">
+                <a:solidFill>
+                  <a:srgbClr val="E2C97E"/>
+                </a:solidFill>
+                <a:latin typeface="Cambria" pitchFamily="34" charset="0"/>
+                <a:ea typeface="Cambria" pitchFamily="34" charset="-122"/>
+                <a:cs typeface="Cambria" pitchFamily="34" charset="-120"/>
+              </a:rPr>
+              <a:t>On-Prem</a:t>
+            </a:r>
+          </a:p>
+        </p:txBody>
+      </p:sp>
+      <p:sp>
+        <p:nvSpPr>
+          <p:cNvPr id="46" name="Text 36"/>
+          <p:cNvSpPr/>
+          <p:nvPr/>
+        </p:nvSpPr>
+        <p:spPr>
+          <a:xfrm>
+            <a:off x="4727448" y="4462272"/>
+            <a:ext cx="2011680" cy="274320"/>
+          </a:xfrm>
+          <a:prstGeom prst="rect">
+            <a:avLst/>
+          </a:prstGeom>
+          <a:noFill/>
+          <a:ln/>
+        </p:spPr>
+        <p:txBody>
+          <a:bodyPr wrap="square" lIns="0" tIns="0" rIns="0" bIns="0" rtlCol="0" anchor="ctr"/>
+          <a:lstStyle/>
+          <a:p>
+            <a:pPr marL="0" indent="0" algn="ctr">
+              <a:buNone/>
+            </a:pPr>
+            <a:r>
+              <a:rPr lang="en-US" sz="1000" dirty="0">
+                <a:solidFill>
+                  <a:srgbClr val="999999"/>
+                </a:solidFill>
+                <a:latin typeface="Calibri" pitchFamily="34" charset="0"/>
+                <a:ea typeface="Calibri" pitchFamily="34" charset="-122"/>
+                <a:cs typeface="Calibri" pitchFamily="34" charset="-120"/>
+              </a:rPr>
+              <a:t>Data Center BSN</a:t>
+            </a:r>
+          </a:p>
+        </p:txBody>
+      </p:sp>
+      <p:sp>
+        <p:nvSpPr>
+          <p:cNvPr id="47" name="Shape 37"/>
+          <p:cNvSpPr/>
+          <p:nvPr/>
+        </p:nvSpPr>
+        <p:spPr>
+          <a:xfrm>
+            <a:off x="6885432" y="4078224"/>
+            <a:ext cx="2011680" cy="749808"/>
+          </a:xfrm>
+          <a:prstGeom prst="roundRect">
+            <a:avLst>
+              <a:gd name="adj" fmla="val 9756"/>
+            </a:avLst>
+          </a:prstGeom>
+          <a:solidFill>
+            <a:srgbClr val="FFFFFF">
+              <a:alpha val="10000"/>
+            </a:srgbClr>
+          </a:solidFill>
+          <a:ln w="12700">
+            <a:solidFill>
+              <a:srgbClr val="FFFFFF">
+                <a:alpha val="15000"/>
+              </a:srgbClr>
+            </a:solidFill>
+            <a:prstDash val="solid"/>
+          </a:ln>
+        </p:spPr>
+        <p:txBody>
+          <a:bodyPr/>
+          <a:p/>
+        </p:txBody>
+      </p:sp>
+      <p:sp>
+        <p:nvSpPr>
+          <p:cNvPr id="48" name="Text 38"/>
+          <p:cNvSpPr/>
+          <p:nvPr/>
+        </p:nvSpPr>
+        <p:spPr>
+          <a:xfrm>
+            <a:off x="6885432" y="4114800"/>
+            <a:ext cx="2011680" cy="347472"/>
+          </a:xfrm>
+          <a:prstGeom prst="rect">
+            <a:avLst/>
+          </a:prstGeom>
+          <a:noFill/>
+          <a:ln/>
+        </p:spPr>
+        <p:txBody>
+          <a:bodyPr wrap="square" lIns="0" tIns="0" rIns="0" bIns="0" rtlCol="0" anchor="ctr"/>
+          <a:lstStyle/>
+          <a:p>
+            <a:pPr marL="0" indent="0" algn="ctr">
+              <a:buNone/>
+            </a:pPr>
+            <a:r>
+              <a:rPr lang="en-US" sz="2200" b="1" dirty="0">
+                <a:solidFill>
+                  <a:srgbClr val="E2C97E"/>
+                </a:solidFill>
+                <a:latin typeface="Cambria" pitchFamily="34" charset="0"/>
+                <a:ea typeface="Cambria" pitchFamily="34" charset="-122"/>
+                <a:cs typeface="Cambria" pitchFamily="34" charset="-120"/>
+              </a:rPr>
+              <a:t>30 Hari</a:t>
+            </a:r>
+          </a:p>
+        </p:txBody>
+      </p:sp>
+      <p:sp>
+        <p:nvSpPr>
+          <p:cNvPr id="49" name="Text 39"/>
+          <p:cNvSpPr/>
+          <p:nvPr/>
+        </p:nvSpPr>
+        <p:spPr>
+          <a:xfrm>
+            <a:off x="6885432" y="4462272"/>
+            <a:ext cx="2011680" cy="274320"/>
+          </a:xfrm>
+          <a:prstGeom prst="rect">
+            <a:avLst/>
+          </a:prstGeom>
+          <a:noFill/>
+          <a:ln/>
+        </p:spPr>
+        <p:txBody>
+          <a:bodyPr wrap="square" lIns="0" tIns="0" rIns="0" bIns="0" rtlCol="0" anchor="ctr"/>
+          <a:lstStyle/>
+          <a:p>
+            <a:pPr marL="0" indent="0" algn="ctr">
+              <a:buNone/>
+            </a:pPr>
+            <a:r>
+              <a:rPr lang="en-US" sz="1000" dirty="0">
+                <a:solidFill>
+                  <a:srgbClr val="999999"/>
+                </a:solidFill>
+                <a:latin typeface="Calibri" pitchFamily="34" charset="0"/>
+                <a:ea typeface="Calibri" pitchFamily="34" charset="-122"/>
+                <a:cs typeface="Calibri" pitchFamily="34" charset="-120"/>
+              </a:rPr>
+              <a:t>Retensi Backup</a:t>
+            </a:r>
+          </a:p>
+        </p:txBody>
+      </p:sp>
+      <p:sp>
+        <p:nvSpPr>
+          <p:cNvPr id="50" name="Text 40"/>
+          <p:cNvSpPr/>
+          <p:nvPr/>
+        </p:nvSpPr>
+        <p:spPr>
+          <a:xfrm>
+            <a:off x="8046720" y="4919472"/>
+            <a:ext cx="1005840" cy="201168"/>
+          </a:xfrm>
+          <a:prstGeom prst="rect">
+            <a:avLst/>
+          </a:prstGeom>
+          <a:noFill/>
+          <a:ln/>
+        </p:spPr>
+        <p:txBody>
+          <a:bodyPr wrap="square" rtlCol="0" anchor="ctr"/>
+          <a:lstStyle/>
+          <a:p>
+            <a:pPr marL="0" indent="0" algn="r">
+              <a:buNone/>
+            </a:pPr>
+            <a:r>
+              <a:rPr lang="en-US" sz="800" b="1" dirty="0">
+                <a:solidFill>
+                  <a:srgbClr val="FFFFFF">
+                    <a:alpha val="45000"/>
+                  </a:srgbClr>
+                </a:solidFill>
+                <a:latin typeface="Calibri" pitchFamily="34" charset="0"/>
+                <a:ea typeface="Calibri" pitchFamily="34" charset="-122"/>
+                <a:cs typeface="Calibri" pitchFamily="34" charset="-120"/>
+              </a:rPr>
+              <a:t>12 / 15</a:t>
+            </a:r>
           </a:p>
         </p:txBody>
       </p:sp>
